--- a/assets/반도체가스_원페이지_요약.pptx
+++ b/assets/반도체가스_원페이지_요약.pptx
@@ -856,9 +856,16 @@
   <p:cSld name="Slide 1">
     <p:bg>
       <p:bgPr>
-        <a:solidFill>
-          <a:srgbClr val="0B3D62"/>
-        </a:solidFill>
+        <a:blipFill dpi="0" rotWithShape="1">
+          <a:blip r:embed="rId1">
+            <a:lum/>
+          </a:blip>
+          <a:srcRect/>
+          <a:stretch>
+            <a:fillRect/>
+          </a:stretch>
+        </a:blipFill>
+        <a:effectLst/>
       </p:bgPr>
     </p:bg>
     <p:spTree>
@@ -884,7 +891,7 @@
         <p:spPr>
           <a:xfrm>
             <a:off x="548640" y="292608"/>
-            <a:ext cx="7772400" cy="685800"/>
+            <a:ext cx="7223760" cy="731520"/>
           </a:xfrm>
           <a:prstGeom prst="rect">
             <a:avLst/>
@@ -908,7 +915,21 @@
                 <a:ea typeface="Cambria" pitchFamily="34" charset="-122"/>
                 <a:cs typeface="Cambria" pitchFamily="34" charset="-120"/>
               </a:rPr>
-              <a:t>반도체 가스</a:t>
+              <a:t>반도체 </a:t>
+            </a:r>
+            <a:pPr indent="0" marL="0">
+              <a:buNone/>
+            </a:pPr>
+            <a:r>
+              <a:rPr lang="en-US" sz="3400" b="1" dirty="0">
+                <a:solidFill>
+                  <a:srgbClr val="5FD3F3"/>
+                </a:solidFill>
+                <a:latin typeface="Cambria" pitchFamily="34" charset="0"/>
+                <a:ea typeface="Cambria" pitchFamily="34" charset="-122"/>
+                <a:cs typeface="Cambria" pitchFamily="34" charset="-120"/>
+              </a:rPr>
+              <a:t>가스</a:t>
             </a:r>
             <a:endParaRPr lang="en-US" sz="3400" dirty="0"/>
           </a:p>
@@ -922,8 +943,8 @@
         </p:nvSpPr>
         <p:spPr>
           <a:xfrm>
-            <a:off x="548640" y="932688"/>
-            <a:ext cx="10515600" cy="365760"/>
+            <a:off x="548640" y="1005840"/>
+            <a:ext cx="7223760" cy="365760"/>
           </a:xfrm>
           <a:prstGeom prst="rect">
             <a:avLst/>
@@ -939,7 +960,7 @@
               <a:buNone/>
             </a:pPr>
             <a:r>
-              <a:rPr lang="en-US" sz="1350" i="1" dirty="0">
+              <a:rPr lang="en-US" sz="1300" i="1" dirty="0">
                 <a:solidFill>
                   <a:srgbClr val="5FD3F3"/>
                 </a:solidFill>
@@ -949,7 +970,7 @@
               </a:rPr>
               <a:t>보이지 않지만 무기가 되다 — 정의부터 제조·분석·공급까지, 한 장으로 보는 전체 흐름</a:t>
             </a:r>
-            <a:endParaRPr lang="en-US" sz="1350" dirty="0"/>
+            <a:endParaRPr lang="en-US" sz="1300" dirty="0"/>
           </a:p>
         </p:txBody>
       </p:sp>
@@ -961,51 +982,1365 @@
         </p:nvSpPr>
         <p:spPr>
           <a:xfrm>
-            <a:off x="1624562" y="1975104"/>
-            <a:ext cx="1017988" cy="0"/>
+            <a:off x="8351215" y="292608"/>
+            <a:ext cx="3291840" cy="1261872"/>
+          </a:xfrm>
+          <a:prstGeom prst="roundRect">
+            <a:avLst>
+              <a:gd name="adj" fmla="val 6522"/>
+            </a:avLst>
+          </a:prstGeom>
+          <a:solidFill>
+            <a:srgbClr val="1C7293"/>
+          </a:solidFill>
+          <a:ln/>
+          <a:effectLst>
+            <a:outerShdw sx="100000" sy="100000" kx="0" ky="0" algn="bl" rotWithShape="0" blurRad="101600" dist="38100" dir="5400000">
+              <a:srgbClr val="000000">
+                <a:alpha val="40000"/>
+              </a:srgbClr>
+            </a:outerShdw>
+          </a:effectLst>
+        </p:spPr>
+      </p:sp>
+      <p:pic>
+        <p:nvPicPr>
+          <p:cNvPr id="5" name="Image 0" descr="/tmp/claude-0/-home-user-education/1a4dac63-0322-5893-ae55-dbf45817515a/scratchpad/pptx_onepager/icon_card_market.png">    </p:cNvPr>
+          <p:cNvPicPr>
+            <a:picLocks noChangeAspect="1"/>
+          </p:cNvPicPr>
+          <p:nvPr/>
+        </p:nvPicPr>
+        <p:blipFill>
+          <a:blip r:embed="rId2"/>
+          <a:stretch>
+            <a:fillRect/>
+          </a:stretch>
+        </p:blipFill>
+        <p:spPr>
+          <a:xfrm>
+            <a:off x="8552383" y="493776"/>
+            <a:ext cx="384048" cy="384048"/>
+          </a:xfrm>
+          <a:prstGeom prst="rect">
+            <a:avLst/>
+          </a:prstGeom>
+        </p:spPr>
+      </p:pic>
+      <p:sp>
+        <p:nvSpPr>
+          <p:cNvPr id="6" name="Text 3"/>
+          <p:cNvSpPr txBox="1"/>
+          <p:nvPr/>
+        </p:nvSpPr>
+        <p:spPr>
+          <a:xfrm>
+            <a:off x="9037015" y="457200"/>
+            <a:ext cx="2423160" cy="274320"/>
+          </a:xfrm>
+          <a:prstGeom prst="rect">
+            <a:avLst/>
+          </a:prstGeom>
+          <a:noFill/>
+          <a:ln/>
+        </p:spPr>
+        <p:txBody>
+          <a:bodyPr wrap="square" lIns="0" tIns="0" rIns="0" bIns="0" rtlCol="0" anchor="ctr"/>
+          <a:lstStyle/>
+          <a:p>
+            <a:pPr indent="0" marL="0">
+              <a:buNone/>
+            </a:pPr>
+            <a:r>
+              <a:rPr lang="en-US" sz="1150" b="1" dirty="0">
+                <a:solidFill>
+                  <a:srgbClr val="F4F8FB"/>
+                </a:solidFill>
+                <a:latin typeface="Calibri" pitchFamily="34" charset="0"/>
+                <a:ea typeface="Calibri" pitchFamily="34" charset="-122"/>
+                <a:cs typeface="Calibri" pitchFamily="34" charset="-120"/>
+              </a:rPr>
+              <a:t>2034년 시장 전망</a:t>
+            </a:r>
+            <a:endParaRPr lang="en-US" sz="1150" dirty="0"/>
+          </a:p>
+        </p:txBody>
+      </p:sp>
+      <p:sp>
+        <p:nvSpPr>
+          <p:cNvPr id="7" name="Text 4"/>
+          <p:cNvSpPr txBox="1"/>
+          <p:nvPr/>
+        </p:nvSpPr>
+        <p:spPr>
+          <a:xfrm>
+            <a:off x="8552383" y="749808"/>
+            <a:ext cx="2926080" cy="457200"/>
+          </a:xfrm>
+          <a:prstGeom prst="rect">
+            <a:avLst/>
+          </a:prstGeom>
+          <a:noFill/>
+          <a:ln/>
+        </p:spPr>
+        <p:txBody>
+          <a:bodyPr wrap="square" lIns="0" tIns="0" rIns="0" bIns="0" rtlCol="0" anchor="ctr"/>
+          <a:lstStyle/>
+          <a:p>
+            <a:pPr algn="l" indent="0" marL="0">
+              <a:buNone/>
+            </a:pPr>
+            <a:r>
+              <a:rPr lang="en-US" sz="3000" b="1" dirty="0">
+                <a:solidFill>
+                  <a:srgbClr val="5FD3F3"/>
+                </a:solidFill>
+                <a:latin typeface="Cambria" pitchFamily="34" charset="0"/>
+                <a:ea typeface="Cambria" pitchFamily="34" charset="-122"/>
+                <a:cs typeface="Cambria" pitchFamily="34" charset="-120"/>
+              </a:rPr>
+              <a:t>224.9</a:t>
+            </a:r>
+            <a:pPr algn="l" indent="0" marL="0">
+              <a:buNone/>
+            </a:pPr>
+            <a:r>
+              <a:rPr lang="en-US" sz="1600" b="1" dirty="0">
+                <a:solidFill>
+                  <a:srgbClr val="5FD3F3"/>
+                </a:solidFill>
+                <a:latin typeface="Cambria" pitchFamily="34" charset="0"/>
+                <a:ea typeface="Cambria" pitchFamily="34" charset="-122"/>
+                <a:cs typeface="Cambria" pitchFamily="34" charset="-120"/>
+              </a:rPr>
+              <a:t>억$</a:t>
+            </a:r>
+            <a:endParaRPr lang="en-US" sz="3000" dirty="0"/>
+          </a:p>
+        </p:txBody>
+      </p:sp>
+      <p:sp>
+        <p:nvSpPr>
+          <p:cNvPr id="8" name="Text 5"/>
+          <p:cNvSpPr txBox="1"/>
+          <p:nvPr/>
+        </p:nvSpPr>
+        <p:spPr>
+          <a:xfrm>
+            <a:off x="8552383" y="1261872"/>
+            <a:ext cx="2926080" cy="256032"/>
+          </a:xfrm>
+          <a:prstGeom prst="rect">
+            <a:avLst/>
+          </a:prstGeom>
+          <a:noFill/>
+          <a:ln/>
+        </p:spPr>
+        <p:txBody>
+          <a:bodyPr wrap="square" lIns="0" tIns="0" rIns="0" bIns="0" rtlCol="0" anchor="ctr"/>
+          <a:lstStyle/>
+          <a:p>
+            <a:pPr indent="0" marL="0">
+              <a:buNone/>
+            </a:pPr>
+            <a:r>
+              <a:rPr lang="en-US" sz="1000" dirty="0">
+                <a:solidFill>
+                  <a:srgbClr val="F4F8FB"/>
+                </a:solidFill>
+                <a:latin typeface="Calibri" pitchFamily="34" charset="0"/>
+                <a:ea typeface="Calibri" pitchFamily="34" charset="-122"/>
+                <a:cs typeface="Calibri" pitchFamily="34" charset="-120"/>
+              </a:rPr>
+              <a:t>연평균 7.54% 성장 (2025→2034)</a:t>
+            </a:r>
+            <a:endParaRPr lang="en-US" sz="1000" dirty="0"/>
+          </a:p>
+        </p:txBody>
+      </p:sp>
+      <p:sp>
+        <p:nvSpPr>
+          <p:cNvPr id="9" name="Shape 6"/>
+          <p:cNvSpPr/>
+          <p:nvPr/>
+        </p:nvSpPr>
+        <p:spPr>
+          <a:xfrm>
+            <a:off x="1642850" y="2112264"/>
+            <a:ext cx="981412" cy="0"/>
           </a:xfrm>
           <a:prstGeom prst="line">
             <a:avLst/>
           </a:prstGeom>
           <a:noFill/>
-          <a:ln w="22225">
+          <a:ln w="19050">
+            <a:solidFill>
+              <a:srgbClr val="5FD3F3">
+                <a:alpha val="65000"/>
+              </a:srgbClr>
+            </a:solidFill>
+            <a:prstDash val="solid"/>
+          </a:ln>
+        </p:spPr>
+      </p:sp>
+      <p:sp>
+        <p:nvSpPr>
+          <p:cNvPr id="10" name="Shape 7"/>
+          <p:cNvSpPr/>
+          <p:nvPr/>
+        </p:nvSpPr>
+        <p:spPr>
+          <a:xfrm>
+            <a:off x="1039346" y="1810512"/>
+            <a:ext cx="603504" cy="603504"/>
+          </a:xfrm>
+          <a:prstGeom prst="ellipse">
+            <a:avLst/>
+          </a:prstGeom>
+          <a:solidFill>
+            <a:srgbClr val="1C7293"/>
+          </a:solidFill>
+          <a:ln w="9525">
+            <a:solidFill>
+              <a:srgbClr val="5FD3F3"/>
+            </a:solidFill>
+            <a:prstDash val="solid"/>
+          </a:ln>
+          <a:effectLst>
+            <a:outerShdw sx="100000" sy="100000" kx="0" ky="0" algn="bl" rotWithShape="0" blurRad="63500" dist="25400" dir="5400000">
+              <a:srgbClr val="000000">
+                <a:alpha val="35000"/>
+              </a:srgbClr>
+            </a:outerShdw>
+          </a:effectLst>
+        </p:spPr>
+      </p:sp>
+      <p:pic>
+        <p:nvPicPr>
+          <p:cNvPr id="11" name="Image 1" descr="/tmp/claude-0/-home-user-education/1a4dac63-0322-5893-ae55-dbf45817515a/scratchpad/pptx_onepager/icon_step_material.png">    </p:cNvPr>
+          <p:cNvPicPr>
+            <a:picLocks noChangeAspect="1"/>
+          </p:cNvPicPr>
+          <p:nvPr/>
+        </p:nvPicPr>
+        <p:blipFill>
+          <a:blip r:embed="rId3"/>
+          <a:stretch>
+            <a:fillRect/>
+          </a:stretch>
+        </p:blipFill>
+        <p:spPr>
+          <a:xfrm>
+            <a:off x="1185650" y="1956816"/>
+            <a:ext cx="310896" cy="310896"/>
+          </a:xfrm>
+          <a:prstGeom prst="rect">
+            <a:avLst/>
+          </a:prstGeom>
+        </p:spPr>
+      </p:pic>
+      <p:sp>
+        <p:nvSpPr>
+          <p:cNvPr id="12" name="Text 8"/>
+          <p:cNvSpPr txBox="1"/>
+          <p:nvPr/>
+        </p:nvSpPr>
+        <p:spPr>
+          <a:xfrm>
+            <a:off x="1203938" y="1682496"/>
+            <a:ext cx="274320" cy="182880"/>
+          </a:xfrm>
+          <a:prstGeom prst="rect">
+            <a:avLst/>
+          </a:prstGeom>
+          <a:noFill/>
+          <a:ln/>
+        </p:spPr>
+        <p:txBody>
+          <a:bodyPr wrap="square" lIns="0" tIns="0" rIns="0" bIns="0" rtlCol="0" anchor="ctr"/>
+          <a:lstStyle/>
+          <a:p>
+            <a:pPr algn="ctr" indent="0" marL="0">
+              <a:buNone/>
+            </a:pPr>
+            <a:r>
+              <a:rPr lang="en-US" sz="900" b="1" dirty="0">
+                <a:solidFill>
+                  <a:srgbClr val="5FD3F3"/>
+                </a:solidFill>
+                <a:latin typeface="Calibri" pitchFamily="34" charset="0"/>
+                <a:ea typeface="Calibri" pitchFamily="34" charset="-122"/>
+                <a:cs typeface="Calibri" pitchFamily="34" charset="-120"/>
+              </a:rPr>
+              <a:t>1</a:t>
+            </a:r>
+            <a:endParaRPr lang="en-US" sz="900" dirty="0"/>
+          </a:p>
+        </p:txBody>
+      </p:sp>
+      <p:sp>
+        <p:nvSpPr>
+          <p:cNvPr id="13" name="Text 9"/>
+          <p:cNvSpPr txBox="1"/>
+          <p:nvPr/>
+        </p:nvSpPr>
+        <p:spPr>
+          <a:xfrm>
+            <a:off x="594360" y="2505456"/>
+            <a:ext cx="1493476" cy="457200"/>
+          </a:xfrm>
+          <a:prstGeom prst="rect">
+            <a:avLst/>
+          </a:prstGeom>
+          <a:noFill/>
+          <a:ln/>
+        </p:spPr>
+        <p:txBody>
+          <a:bodyPr wrap="square" lIns="0" tIns="0" rIns="0" bIns="0" rtlCol="0" anchor="t"/>
+          <a:lstStyle/>
+          <a:p>
+            <a:pPr algn="ctr" indent="0" marL="0">
+              <a:buNone/>
+            </a:pPr>
+            <a:r>
+              <a:rPr lang="en-US" sz="1150" b="1" dirty="0">
+                <a:solidFill>
+                  <a:srgbClr val="F4F8FB"/>
+                </a:solidFill>
+                <a:latin typeface="Calibri" pitchFamily="34" charset="0"/>
+                <a:ea typeface="Calibri" pitchFamily="34" charset="-122"/>
+                <a:cs typeface="Calibri" pitchFamily="34" charset="-120"/>
+              </a:rPr>
+              <a:t>원료</a:t>
+            </a:r>
+            <a:endParaRPr lang="en-US" sz="1150" dirty="0"/>
+          </a:p>
+        </p:txBody>
+      </p:sp>
+      <p:sp>
+        <p:nvSpPr>
+          <p:cNvPr id="14" name="Shape 10"/>
+          <p:cNvSpPr/>
+          <p:nvPr/>
+        </p:nvSpPr>
+        <p:spPr>
+          <a:xfrm>
+            <a:off x="3227767" y="2112264"/>
+            <a:ext cx="981412" cy="0"/>
+          </a:xfrm>
+          <a:prstGeom prst="line">
+            <a:avLst/>
+          </a:prstGeom>
+          <a:noFill/>
+          <a:ln w="19050">
+            <a:solidFill>
+              <a:srgbClr val="5FD3F3">
+                <a:alpha val="65000"/>
+              </a:srgbClr>
+            </a:solidFill>
+            <a:prstDash val="solid"/>
+          </a:ln>
+        </p:spPr>
+      </p:sp>
+      <p:sp>
+        <p:nvSpPr>
+          <p:cNvPr id="15" name="Shape 11"/>
+          <p:cNvSpPr/>
+          <p:nvPr/>
+        </p:nvSpPr>
+        <p:spPr>
+          <a:xfrm>
+            <a:off x="2624263" y="1810512"/>
+            <a:ext cx="603504" cy="603504"/>
+          </a:xfrm>
+          <a:prstGeom prst="ellipse">
+            <a:avLst/>
+          </a:prstGeom>
+          <a:solidFill>
+            <a:srgbClr val="1C7293"/>
+          </a:solidFill>
+          <a:ln w="9525">
+            <a:solidFill>
+              <a:srgbClr val="5FD3F3"/>
+            </a:solidFill>
+            <a:prstDash val="solid"/>
+          </a:ln>
+          <a:effectLst>
+            <a:outerShdw sx="100000" sy="100000" kx="0" ky="0" algn="bl" rotWithShape="0" blurRad="63500" dist="25400" dir="5400000">
+              <a:srgbClr val="000000">
+                <a:alpha val="35000"/>
+              </a:srgbClr>
+            </a:outerShdw>
+          </a:effectLst>
+        </p:spPr>
+      </p:sp>
+      <p:pic>
+        <p:nvPicPr>
+          <p:cNvPr id="16" name="Image 2" descr="/tmp/claude-0/-home-user-education/1a4dac63-0322-5893-ae55-dbf45817515a/scratchpad/pptx_onepager/icon_step_synthesis.png">    </p:cNvPr>
+          <p:cNvPicPr>
+            <a:picLocks noChangeAspect="1"/>
+          </p:cNvPicPr>
+          <p:nvPr/>
+        </p:nvPicPr>
+        <p:blipFill>
+          <a:blip r:embed="rId4"/>
+          <a:stretch>
+            <a:fillRect/>
+          </a:stretch>
+        </p:blipFill>
+        <p:spPr>
+          <a:xfrm>
+            <a:off x="2770567" y="1956816"/>
+            <a:ext cx="310896" cy="310896"/>
+          </a:xfrm>
+          <a:prstGeom prst="rect">
+            <a:avLst/>
+          </a:prstGeom>
+        </p:spPr>
+      </p:pic>
+      <p:sp>
+        <p:nvSpPr>
+          <p:cNvPr id="17" name="Text 12"/>
+          <p:cNvSpPr txBox="1"/>
+          <p:nvPr/>
+        </p:nvSpPr>
+        <p:spPr>
+          <a:xfrm>
+            <a:off x="2788855" y="1682496"/>
+            <a:ext cx="274320" cy="182880"/>
+          </a:xfrm>
+          <a:prstGeom prst="rect">
+            <a:avLst/>
+          </a:prstGeom>
+          <a:noFill/>
+          <a:ln/>
+        </p:spPr>
+        <p:txBody>
+          <a:bodyPr wrap="square" lIns="0" tIns="0" rIns="0" bIns="0" rtlCol="0" anchor="ctr"/>
+          <a:lstStyle/>
+          <a:p>
+            <a:pPr algn="ctr" indent="0" marL="0">
+              <a:buNone/>
+            </a:pPr>
+            <a:r>
+              <a:rPr lang="en-US" sz="900" b="1" dirty="0">
+                <a:solidFill>
+                  <a:srgbClr val="5FD3F3"/>
+                </a:solidFill>
+                <a:latin typeface="Calibri" pitchFamily="34" charset="0"/>
+                <a:ea typeface="Calibri" pitchFamily="34" charset="-122"/>
+                <a:cs typeface="Calibri" pitchFamily="34" charset="-120"/>
+              </a:rPr>
+              <a:t>2</a:t>
+            </a:r>
+            <a:endParaRPr lang="en-US" sz="900" dirty="0"/>
+          </a:p>
+        </p:txBody>
+      </p:sp>
+      <p:sp>
+        <p:nvSpPr>
+          <p:cNvPr id="18" name="Text 13"/>
+          <p:cNvSpPr txBox="1"/>
+          <p:nvPr/>
+        </p:nvSpPr>
+        <p:spPr>
+          <a:xfrm>
+            <a:off x="2179276" y="2505456"/>
+            <a:ext cx="1493476" cy="457200"/>
+          </a:xfrm>
+          <a:prstGeom prst="rect">
+            <a:avLst/>
+          </a:prstGeom>
+          <a:noFill/>
+          <a:ln/>
+        </p:spPr>
+        <p:txBody>
+          <a:bodyPr wrap="square" lIns="0" tIns="0" rIns="0" bIns="0" rtlCol="0" anchor="t"/>
+          <a:lstStyle/>
+          <a:p>
+            <a:pPr algn="ctr" indent="0" marL="0">
+              <a:buNone/>
+            </a:pPr>
+            <a:r>
+              <a:rPr lang="en-US" sz="1150" b="1" dirty="0">
+                <a:solidFill>
+                  <a:srgbClr val="F4F8FB"/>
+                </a:solidFill>
+                <a:latin typeface="Calibri" pitchFamily="34" charset="0"/>
+                <a:ea typeface="Calibri" pitchFamily="34" charset="-122"/>
+                <a:cs typeface="Calibri" pitchFamily="34" charset="-120"/>
+              </a:rPr>
+              <a:t>합성</a:t>
+            </a:r>
+            <a:endParaRPr lang="en-US" sz="1150" dirty="0"/>
+          </a:p>
+        </p:txBody>
+      </p:sp>
+      <p:sp>
+        <p:nvSpPr>
+          <p:cNvPr id="19" name="Shape 14"/>
+          <p:cNvSpPr/>
+          <p:nvPr/>
+        </p:nvSpPr>
+        <p:spPr>
+          <a:xfrm>
+            <a:off x="4812683" y="2112264"/>
+            <a:ext cx="981412" cy="0"/>
+          </a:xfrm>
+          <a:prstGeom prst="line">
+            <a:avLst/>
+          </a:prstGeom>
+          <a:noFill/>
+          <a:ln w="19050">
+            <a:solidFill>
+              <a:srgbClr val="5FD3F3">
+                <a:alpha val="65000"/>
+              </a:srgbClr>
+            </a:solidFill>
+            <a:prstDash val="solid"/>
+          </a:ln>
+        </p:spPr>
+      </p:sp>
+      <p:sp>
+        <p:nvSpPr>
+          <p:cNvPr id="20" name="Shape 15"/>
+          <p:cNvSpPr/>
+          <p:nvPr/>
+        </p:nvSpPr>
+        <p:spPr>
+          <a:xfrm>
+            <a:off x="4209179" y="1810512"/>
+            <a:ext cx="603504" cy="603504"/>
+          </a:xfrm>
+          <a:prstGeom prst="ellipse">
+            <a:avLst/>
+          </a:prstGeom>
+          <a:solidFill>
+            <a:srgbClr val="1C7293"/>
+          </a:solidFill>
+          <a:ln w="9525">
+            <a:solidFill>
+              <a:srgbClr val="5FD3F3"/>
+            </a:solidFill>
+            <a:prstDash val="solid"/>
+          </a:ln>
+          <a:effectLst>
+            <a:outerShdw sx="100000" sy="100000" kx="0" ky="0" algn="bl" rotWithShape="0" blurRad="63500" dist="25400" dir="5400000">
+              <a:srgbClr val="000000">
+                <a:alpha val="35000"/>
+              </a:srgbClr>
+            </a:outerShdw>
+          </a:effectLst>
+        </p:spPr>
+      </p:sp>
+      <p:pic>
+        <p:nvPicPr>
+          <p:cNvPr id="21" name="Image 3" descr="/tmp/claude-0/-home-user-education/1a4dac63-0322-5893-ae55-dbf45817515a/scratchpad/pptx_onepager/icon_step_purify.png">    </p:cNvPr>
+          <p:cNvPicPr>
+            <a:picLocks noChangeAspect="1"/>
+          </p:cNvPicPr>
+          <p:nvPr/>
+        </p:nvPicPr>
+        <p:blipFill>
+          <a:blip r:embed="rId5"/>
+          <a:stretch>
+            <a:fillRect/>
+          </a:stretch>
+        </p:blipFill>
+        <p:spPr>
+          <a:xfrm>
+            <a:off x="4355483" y="1956816"/>
+            <a:ext cx="310896" cy="310896"/>
+          </a:xfrm>
+          <a:prstGeom prst="rect">
+            <a:avLst/>
+          </a:prstGeom>
+        </p:spPr>
+      </p:pic>
+      <p:sp>
+        <p:nvSpPr>
+          <p:cNvPr id="22" name="Text 16"/>
+          <p:cNvSpPr txBox="1"/>
+          <p:nvPr/>
+        </p:nvSpPr>
+        <p:spPr>
+          <a:xfrm>
+            <a:off x="4373771" y="1682496"/>
+            <a:ext cx="274320" cy="182880"/>
+          </a:xfrm>
+          <a:prstGeom prst="rect">
+            <a:avLst/>
+          </a:prstGeom>
+          <a:noFill/>
+          <a:ln/>
+        </p:spPr>
+        <p:txBody>
+          <a:bodyPr wrap="square" lIns="0" tIns="0" rIns="0" bIns="0" rtlCol="0" anchor="ctr"/>
+          <a:lstStyle/>
+          <a:p>
+            <a:pPr algn="ctr" indent="0" marL="0">
+              <a:buNone/>
+            </a:pPr>
+            <a:r>
+              <a:rPr lang="en-US" sz="900" b="1" dirty="0">
+                <a:solidFill>
+                  <a:srgbClr val="5FD3F3"/>
+                </a:solidFill>
+                <a:latin typeface="Calibri" pitchFamily="34" charset="0"/>
+                <a:ea typeface="Calibri" pitchFamily="34" charset="-122"/>
+                <a:cs typeface="Calibri" pitchFamily="34" charset="-120"/>
+              </a:rPr>
+              <a:t>3</a:t>
+            </a:r>
+            <a:endParaRPr lang="en-US" sz="900" dirty="0"/>
+          </a:p>
+        </p:txBody>
+      </p:sp>
+      <p:sp>
+        <p:nvSpPr>
+          <p:cNvPr id="23" name="Text 17"/>
+          <p:cNvSpPr txBox="1"/>
+          <p:nvPr/>
+        </p:nvSpPr>
+        <p:spPr>
+          <a:xfrm>
+            <a:off x="3764193" y="2505456"/>
+            <a:ext cx="1493476" cy="457200"/>
+          </a:xfrm>
+          <a:prstGeom prst="rect">
+            <a:avLst/>
+          </a:prstGeom>
+          <a:noFill/>
+          <a:ln/>
+        </p:spPr>
+        <p:txBody>
+          <a:bodyPr wrap="square" lIns="0" tIns="0" rIns="0" bIns="0" rtlCol="0" anchor="t"/>
+          <a:lstStyle/>
+          <a:p>
+            <a:pPr algn="ctr" indent="0" marL="0">
+              <a:buNone/>
+            </a:pPr>
+            <a:r>
+              <a:rPr lang="en-US" sz="1150" b="1" dirty="0">
+                <a:solidFill>
+                  <a:srgbClr val="F4F8FB"/>
+                </a:solidFill>
+                <a:latin typeface="Calibri" pitchFamily="34" charset="0"/>
+                <a:ea typeface="Calibri" pitchFamily="34" charset="-122"/>
+                <a:cs typeface="Calibri" pitchFamily="34" charset="-120"/>
+              </a:rPr>
+              <a:t>정제</a:t>
+            </a:r>
+            <a:endParaRPr lang="en-US" sz="1150" dirty="0"/>
+          </a:p>
+        </p:txBody>
+      </p:sp>
+      <p:sp>
+        <p:nvSpPr>
+          <p:cNvPr id="24" name="Shape 18"/>
+          <p:cNvSpPr/>
+          <p:nvPr/>
+        </p:nvSpPr>
+        <p:spPr>
+          <a:xfrm>
+            <a:off x="6397600" y="2112264"/>
+            <a:ext cx="981412" cy="0"/>
+          </a:xfrm>
+          <a:prstGeom prst="line">
+            <a:avLst/>
+          </a:prstGeom>
+          <a:noFill/>
+          <a:ln w="19050">
+            <a:solidFill>
+              <a:srgbClr val="5FD3F3">
+                <a:alpha val="65000"/>
+              </a:srgbClr>
+            </a:solidFill>
+            <a:prstDash val="solid"/>
+          </a:ln>
+        </p:spPr>
+      </p:sp>
+      <p:sp>
+        <p:nvSpPr>
+          <p:cNvPr id="25" name="Shape 19"/>
+          <p:cNvSpPr/>
+          <p:nvPr/>
+        </p:nvSpPr>
+        <p:spPr>
+          <a:xfrm>
+            <a:off x="5794096" y="1810512"/>
+            <a:ext cx="603504" cy="603504"/>
+          </a:xfrm>
+          <a:prstGeom prst="ellipse">
+            <a:avLst/>
+          </a:prstGeom>
+          <a:solidFill>
+            <a:srgbClr val="1C7293"/>
+          </a:solidFill>
+          <a:ln w="9525">
+            <a:solidFill>
+              <a:srgbClr val="5FD3F3"/>
+            </a:solidFill>
+            <a:prstDash val="solid"/>
+          </a:ln>
+          <a:effectLst>
+            <a:outerShdw sx="100000" sy="100000" kx="0" ky="0" algn="bl" rotWithShape="0" blurRad="63500" dist="25400" dir="5400000">
+              <a:srgbClr val="000000">
+                <a:alpha val="35000"/>
+              </a:srgbClr>
+            </a:outerShdw>
+          </a:effectLst>
+        </p:spPr>
+      </p:sp>
+      <p:pic>
+        <p:nvPicPr>
+          <p:cNvPr id="26" name="Image 4" descr="/tmp/claude-0/-home-user-education/1a4dac63-0322-5893-ae55-dbf45817515a/scratchpad/pptx_onepager/icon_step_fill.png">    </p:cNvPr>
+          <p:cNvPicPr>
+            <a:picLocks noChangeAspect="1"/>
+          </p:cNvPicPr>
+          <p:nvPr/>
+        </p:nvPicPr>
+        <p:blipFill>
+          <a:blip r:embed="rId6"/>
+          <a:stretch>
+            <a:fillRect/>
+          </a:stretch>
+        </p:blipFill>
+        <p:spPr>
+          <a:xfrm>
+            <a:off x="5940400" y="1956816"/>
+            <a:ext cx="310896" cy="310896"/>
+          </a:xfrm>
+          <a:prstGeom prst="rect">
+            <a:avLst/>
+          </a:prstGeom>
+        </p:spPr>
+      </p:pic>
+      <p:sp>
+        <p:nvSpPr>
+          <p:cNvPr id="27" name="Text 20"/>
+          <p:cNvSpPr txBox="1"/>
+          <p:nvPr/>
+        </p:nvSpPr>
+        <p:spPr>
+          <a:xfrm>
+            <a:off x="5958688" y="1682496"/>
+            <a:ext cx="274320" cy="182880"/>
+          </a:xfrm>
+          <a:prstGeom prst="rect">
+            <a:avLst/>
+          </a:prstGeom>
+          <a:noFill/>
+          <a:ln/>
+        </p:spPr>
+        <p:txBody>
+          <a:bodyPr wrap="square" lIns="0" tIns="0" rIns="0" bIns="0" rtlCol="0" anchor="ctr"/>
+          <a:lstStyle/>
+          <a:p>
+            <a:pPr algn="ctr" indent="0" marL="0">
+              <a:buNone/>
+            </a:pPr>
+            <a:r>
+              <a:rPr lang="en-US" sz="900" b="1" dirty="0">
+                <a:solidFill>
+                  <a:srgbClr val="5FD3F3"/>
+                </a:solidFill>
+                <a:latin typeface="Calibri" pitchFamily="34" charset="0"/>
+                <a:ea typeface="Calibri" pitchFamily="34" charset="-122"/>
+                <a:cs typeface="Calibri" pitchFamily="34" charset="-120"/>
+              </a:rPr>
+              <a:t>4</a:t>
+            </a:r>
+            <a:endParaRPr lang="en-US" sz="900" dirty="0"/>
+          </a:p>
+        </p:txBody>
+      </p:sp>
+      <p:sp>
+        <p:nvSpPr>
+          <p:cNvPr id="28" name="Text 21"/>
+          <p:cNvSpPr txBox="1"/>
+          <p:nvPr/>
+        </p:nvSpPr>
+        <p:spPr>
+          <a:xfrm>
+            <a:off x="5349109" y="2505456"/>
+            <a:ext cx="1493476" cy="457200"/>
+          </a:xfrm>
+          <a:prstGeom prst="rect">
+            <a:avLst/>
+          </a:prstGeom>
+          <a:noFill/>
+          <a:ln/>
+        </p:spPr>
+        <p:txBody>
+          <a:bodyPr wrap="square" lIns="0" tIns="0" rIns="0" bIns="0" rtlCol="0" anchor="t"/>
+          <a:lstStyle/>
+          <a:p>
+            <a:pPr algn="ctr" indent="0" marL="0">
+              <a:buNone/>
+            </a:pPr>
+            <a:r>
+              <a:rPr lang="en-US" sz="1150" b="1" dirty="0">
+                <a:solidFill>
+                  <a:srgbClr val="F4F8FB"/>
+                </a:solidFill>
+                <a:latin typeface="Calibri" pitchFamily="34" charset="0"/>
+                <a:ea typeface="Calibri" pitchFamily="34" charset="-122"/>
+                <a:cs typeface="Calibri" pitchFamily="34" charset="-120"/>
+              </a:rPr>
+              <a:t>충전/믹싱</a:t>
+            </a:r>
+            <a:endParaRPr lang="en-US" sz="1150" dirty="0"/>
+          </a:p>
+        </p:txBody>
+      </p:sp>
+      <p:sp>
+        <p:nvSpPr>
+          <p:cNvPr id="29" name="Shape 22"/>
+          <p:cNvSpPr/>
+          <p:nvPr/>
+        </p:nvSpPr>
+        <p:spPr>
+          <a:xfrm>
+            <a:off x="7982516" y="2112264"/>
+            <a:ext cx="981412" cy="0"/>
+          </a:xfrm>
+          <a:prstGeom prst="line">
+            <a:avLst/>
+          </a:prstGeom>
+          <a:noFill/>
+          <a:ln w="19050">
+            <a:solidFill>
+              <a:srgbClr val="5FD3F3">
+                <a:alpha val="65000"/>
+              </a:srgbClr>
+            </a:solidFill>
+            <a:prstDash val="solid"/>
+          </a:ln>
+        </p:spPr>
+      </p:sp>
+      <p:sp>
+        <p:nvSpPr>
+          <p:cNvPr id="30" name="Shape 23"/>
+          <p:cNvSpPr/>
+          <p:nvPr/>
+        </p:nvSpPr>
+        <p:spPr>
+          <a:xfrm>
+            <a:off x="7379012" y="1810512"/>
+            <a:ext cx="603504" cy="603504"/>
+          </a:xfrm>
+          <a:prstGeom prst="ellipse">
+            <a:avLst/>
+          </a:prstGeom>
+          <a:solidFill>
+            <a:srgbClr val="1C7293"/>
+          </a:solidFill>
+          <a:ln w="9525">
+            <a:solidFill>
+              <a:srgbClr val="5FD3F3"/>
+            </a:solidFill>
+            <a:prstDash val="solid"/>
+          </a:ln>
+          <a:effectLst>
+            <a:outerShdw sx="100000" sy="100000" kx="0" ky="0" algn="bl" rotWithShape="0" blurRad="63500" dist="25400" dir="5400000">
+              <a:srgbClr val="000000">
+                <a:alpha val="35000"/>
+              </a:srgbClr>
+            </a:outerShdw>
+          </a:effectLst>
+        </p:spPr>
+      </p:sp>
+      <p:pic>
+        <p:nvPicPr>
+          <p:cNvPr id="31" name="Image 5" descr="/tmp/claude-0/-home-user-education/1a4dac63-0322-5893-ae55-dbf45817515a/scratchpad/pptx_onepager/icon_step_analysis.png">    </p:cNvPr>
+          <p:cNvPicPr>
+            <a:picLocks noChangeAspect="1"/>
+          </p:cNvPicPr>
+          <p:nvPr/>
+        </p:nvPicPr>
+        <p:blipFill>
+          <a:blip r:embed="rId7"/>
+          <a:stretch>
+            <a:fillRect/>
+          </a:stretch>
+        </p:blipFill>
+        <p:spPr>
+          <a:xfrm>
+            <a:off x="7525316" y="1956816"/>
+            <a:ext cx="310896" cy="310896"/>
+          </a:xfrm>
+          <a:prstGeom prst="rect">
+            <a:avLst/>
+          </a:prstGeom>
+        </p:spPr>
+      </p:pic>
+      <p:sp>
+        <p:nvSpPr>
+          <p:cNvPr id="32" name="Text 24"/>
+          <p:cNvSpPr txBox="1"/>
+          <p:nvPr/>
+        </p:nvSpPr>
+        <p:spPr>
+          <a:xfrm>
+            <a:off x="7543604" y="1682496"/>
+            <a:ext cx="274320" cy="182880"/>
+          </a:xfrm>
+          <a:prstGeom prst="rect">
+            <a:avLst/>
+          </a:prstGeom>
+          <a:noFill/>
+          <a:ln/>
+        </p:spPr>
+        <p:txBody>
+          <a:bodyPr wrap="square" lIns="0" tIns="0" rIns="0" bIns="0" rtlCol="0" anchor="ctr"/>
+          <a:lstStyle/>
+          <a:p>
+            <a:pPr algn="ctr" indent="0" marL="0">
+              <a:buNone/>
+            </a:pPr>
+            <a:r>
+              <a:rPr lang="en-US" sz="900" b="1" dirty="0">
+                <a:solidFill>
+                  <a:srgbClr val="5FD3F3"/>
+                </a:solidFill>
+                <a:latin typeface="Calibri" pitchFamily="34" charset="0"/>
+                <a:ea typeface="Calibri" pitchFamily="34" charset="-122"/>
+                <a:cs typeface="Calibri" pitchFamily="34" charset="-120"/>
+              </a:rPr>
+              <a:t>5</a:t>
+            </a:r>
+            <a:endParaRPr lang="en-US" sz="900" dirty="0"/>
+          </a:p>
+        </p:txBody>
+      </p:sp>
+      <p:sp>
+        <p:nvSpPr>
+          <p:cNvPr id="33" name="Text 25"/>
+          <p:cNvSpPr txBox="1"/>
+          <p:nvPr/>
+        </p:nvSpPr>
+        <p:spPr>
+          <a:xfrm>
+            <a:off x="6934026" y="2505456"/>
+            <a:ext cx="1493476" cy="457200"/>
+          </a:xfrm>
+          <a:prstGeom prst="rect">
+            <a:avLst/>
+          </a:prstGeom>
+          <a:noFill/>
+          <a:ln/>
+        </p:spPr>
+        <p:txBody>
+          <a:bodyPr wrap="square" lIns="0" tIns="0" rIns="0" bIns="0" rtlCol="0" anchor="t"/>
+          <a:lstStyle/>
+          <a:p>
+            <a:pPr algn="ctr" indent="0" marL="0">
+              <a:buNone/>
+            </a:pPr>
+            <a:r>
+              <a:rPr lang="en-US" sz="1150" b="1" dirty="0">
+                <a:solidFill>
+                  <a:srgbClr val="F4F8FB"/>
+                </a:solidFill>
+                <a:latin typeface="Calibri" pitchFamily="34" charset="0"/>
+                <a:ea typeface="Calibri" pitchFamily="34" charset="-122"/>
+                <a:cs typeface="Calibri" pitchFamily="34" charset="-120"/>
+              </a:rPr>
+              <a:t>분석</a:t>
+            </a:r>
+            <a:endParaRPr lang="en-US" sz="1150" dirty="0"/>
+          </a:p>
+        </p:txBody>
+      </p:sp>
+      <p:sp>
+        <p:nvSpPr>
+          <p:cNvPr id="34" name="Shape 26"/>
+          <p:cNvSpPr/>
+          <p:nvPr/>
+        </p:nvSpPr>
+        <p:spPr>
+          <a:xfrm>
+            <a:off x="9567433" y="2112264"/>
+            <a:ext cx="981412" cy="0"/>
+          </a:xfrm>
+          <a:prstGeom prst="line">
+            <a:avLst/>
+          </a:prstGeom>
+          <a:noFill/>
+          <a:ln w="19050">
+            <a:solidFill>
+              <a:srgbClr val="5FD3F3">
+                <a:alpha val="65000"/>
+              </a:srgbClr>
+            </a:solidFill>
+            <a:prstDash val="solid"/>
+          </a:ln>
+        </p:spPr>
+      </p:sp>
+      <p:sp>
+        <p:nvSpPr>
+          <p:cNvPr id="35" name="Shape 27"/>
+          <p:cNvSpPr/>
+          <p:nvPr/>
+        </p:nvSpPr>
+        <p:spPr>
+          <a:xfrm>
+            <a:off x="8963929" y="1810512"/>
+            <a:ext cx="603504" cy="603504"/>
+          </a:xfrm>
+          <a:prstGeom prst="ellipse">
+            <a:avLst/>
+          </a:prstGeom>
+          <a:solidFill>
+            <a:srgbClr val="1C7293"/>
+          </a:solidFill>
+          <a:ln w="9525">
+            <a:solidFill>
+              <a:srgbClr val="5FD3F3"/>
+            </a:solidFill>
+            <a:prstDash val="solid"/>
+          </a:ln>
+          <a:effectLst>
+            <a:outerShdw sx="100000" sy="100000" kx="0" ky="0" algn="bl" rotWithShape="0" blurRad="63500" dist="25400" dir="5400000">
+              <a:srgbClr val="000000">
+                <a:alpha val="35000"/>
+              </a:srgbClr>
+            </a:outerShdw>
+          </a:effectLst>
+        </p:spPr>
+      </p:sp>
+      <p:pic>
+        <p:nvPicPr>
+          <p:cNvPr id="36" name="Image 6" descr="/tmp/claude-0/-home-user-education/1a4dac63-0322-5893-ae55-dbf45817515a/scratchpad/pptx_onepager/icon_step_supply.png">    </p:cNvPr>
+          <p:cNvPicPr>
+            <a:picLocks noChangeAspect="1"/>
+          </p:cNvPicPr>
+          <p:nvPr/>
+        </p:nvPicPr>
+        <p:blipFill>
+          <a:blip r:embed="rId8"/>
+          <a:stretch>
+            <a:fillRect/>
+          </a:stretch>
+        </p:blipFill>
+        <p:spPr>
+          <a:xfrm>
+            <a:off x="9110233" y="1956816"/>
+            <a:ext cx="310896" cy="310896"/>
+          </a:xfrm>
+          <a:prstGeom prst="rect">
+            <a:avLst/>
+          </a:prstGeom>
+        </p:spPr>
+      </p:pic>
+      <p:sp>
+        <p:nvSpPr>
+          <p:cNvPr id="37" name="Text 28"/>
+          <p:cNvSpPr txBox="1"/>
+          <p:nvPr/>
+        </p:nvSpPr>
+        <p:spPr>
+          <a:xfrm>
+            <a:off x="9128521" y="1682496"/>
+            <a:ext cx="274320" cy="182880"/>
+          </a:xfrm>
+          <a:prstGeom prst="rect">
+            <a:avLst/>
+          </a:prstGeom>
+          <a:noFill/>
+          <a:ln/>
+        </p:spPr>
+        <p:txBody>
+          <a:bodyPr wrap="square" lIns="0" tIns="0" rIns="0" bIns="0" rtlCol="0" anchor="ctr"/>
+          <a:lstStyle/>
+          <a:p>
+            <a:pPr algn="ctr" indent="0" marL="0">
+              <a:buNone/>
+            </a:pPr>
+            <a:r>
+              <a:rPr lang="en-US" sz="900" b="1" dirty="0">
+                <a:solidFill>
+                  <a:srgbClr val="5FD3F3"/>
+                </a:solidFill>
+                <a:latin typeface="Calibri" pitchFamily="34" charset="0"/>
+                <a:ea typeface="Calibri" pitchFamily="34" charset="-122"/>
+                <a:cs typeface="Calibri" pitchFamily="34" charset="-120"/>
+              </a:rPr>
+              <a:t>6</a:t>
+            </a:r>
+            <a:endParaRPr lang="en-US" sz="900" dirty="0"/>
+          </a:p>
+        </p:txBody>
+      </p:sp>
+      <p:sp>
+        <p:nvSpPr>
+          <p:cNvPr id="38" name="Text 29"/>
+          <p:cNvSpPr txBox="1"/>
+          <p:nvPr/>
+        </p:nvSpPr>
+        <p:spPr>
+          <a:xfrm>
+            <a:off x="8518942" y="2505456"/>
+            <a:ext cx="1493476" cy="457200"/>
+          </a:xfrm>
+          <a:prstGeom prst="rect">
+            <a:avLst/>
+          </a:prstGeom>
+          <a:noFill/>
+          <a:ln/>
+        </p:spPr>
+        <p:txBody>
+          <a:bodyPr wrap="square" lIns="0" tIns="0" rIns="0" bIns="0" rtlCol="0" anchor="t"/>
+          <a:lstStyle/>
+          <a:p>
+            <a:pPr algn="ctr" indent="0" marL="0">
+              <a:buNone/>
+            </a:pPr>
+            <a:r>
+              <a:rPr lang="en-US" sz="1150" b="1" dirty="0">
+                <a:solidFill>
+                  <a:srgbClr val="F4F8FB"/>
+                </a:solidFill>
+                <a:latin typeface="Calibri" pitchFamily="34" charset="0"/>
+                <a:ea typeface="Calibri" pitchFamily="34" charset="-122"/>
+                <a:cs typeface="Calibri" pitchFamily="34" charset="-120"/>
+              </a:rPr>
+              <a:t>공급</a:t>
+            </a:r>
+            <a:endParaRPr lang="en-US" sz="1150" dirty="0"/>
+          </a:p>
+        </p:txBody>
+      </p:sp>
+      <p:sp>
+        <p:nvSpPr>
+          <p:cNvPr id="39" name="Shape 30"/>
+          <p:cNvSpPr/>
+          <p:nvPr/>
+        </p:nvSpPr>
+        <p:spPr>
+          <a:xfrm>
+            <a:off x="10548845" y="1810512"/>
+            <a:ext cx="603504" cy="603504"/>
+          </a:xfrm>
+          <a:prstGeom prst="ellipse">
+            <a:avLst/>
+          </a:prstGeom>
+          <a:solidFill>
+            <a:srgbClr val="5FD3F3"/>
+          </a:solidFill>
+          <a:ln w="19050">
+            <a:solidFill>
+              <a:srgbClr val="F4F8FB"/>
+            </a:solidFill>
+            <a:prstDash val="solid"/>
+          </a:ln>
+          <a:effectLst>
+            <a:outerShdw sx="100000" sy="100000" kx="0" ky="0" algn="bl" rotWithShape="0" blurRad="63500" dist="25400" dir="5400000">
+              <a:srgbClr val="000000">
+                <a:alpha val="35000"/>
+              </a:srgbClr>
+            </a:outerShdw>
+          </a:effectLst>
+        </p:spPr>
+      </p:sp>
+      <p:pic>
+        <p:nvPicPr>
+          <p:cNvPr id="40" name="Image 7" descr="/tmp/claude-0/-home-user-education/1a4dac63-0322-5893-ae55-dbf45817515a/scratchpad/pptx_onepager/icon_step_process.png">    </p:cNvPr>
+          <p:cNvPicPr>
+            <a:picLocks noChangeAspect="1"/>
+          </p:cNvPicPr>
+          <p:nvPr/>
+        </p:nvPicPr>
+        <p:blipFill>
+          <a:blip r:embed="rId9"/>
+          <a:stretch>
+            <a:fillRect/>
+          </a:stretch>
+        </p:blipFill>
+        <p:spPr>
+          <a:xfrm>
+            <a:off x="10695149" y="1956816"/>
+            <a:ext cx="310896" cy="310896"/>
+          </a:xfrm>
+          <a:prstGeom prst="rect">
+            <a:avLst/>
+          </a:prstGeom>
+        </p:spPr>
+      </p:pic>
+      <p:sp>
+        <p:nvSpPr>
+          <p:cNvPr id="41" name="Text 31"/>
+          <p:cNvSpPr txBox="1"/>
+          <p:nvPr/>
+        </p:nvSpPr>
+        <p:spPr>
+          <a:xfrm>
+            <a:off x="10713437" y="1682496"/>
+            <a:ext cx="274320" cy="182880"/>
+          </a:xfrm>
+          <a:prstGeom prst="rect">
+            <a:avLst/>
+          </a:prstGeom>
+          <a:noFill/>
+          <a:ln/>
+        </p:spPr>
+        <p:txBody>
+          <a:bodyPr wrap="square" lIns="0" tIns="0" rIns="0" bIns="0" rtlCol="0" anchor="ctr"/>
+          <a:lstStyle/>
+          <a:p>
+            <a:pPr algn="ctr" indent="0" marL="0">
+              <a:buNone/>
+            </a:pPr>
+            <a:r>
+              <a:rPr lang="en-US" sz="900" b="1" dirty="0">
+                <a:solidFill>
+                  <a:srgbClr val="5FD3F3"/>
+                </a:solidFill>
+                <a:latin typeface="Calibri" pitchFamily="34" charset="0"/>
+                <a:ea typeface="Calibri" pitchFamily="34" charset="-122"/>
+                <a:cs typeface="Calibri" pitchFamily="34" charset="-120"/>
+              </a:rPr>
+              <a:t>7</a:t>
+            </a:r>
+            <a:endParaRPr lang="en-US" sz="900" dirty="0"/>
+          </a:p>
+        </p:txBody>
+      </p:sp>
+      <p:sp>
+        <p:nvSpPr>
+          <p:cNvPr id="42" name="Text 32"/>
+          <p:cNvSpPr txBox="1"/>
+          <p:nvPr/>
+        </p:nvSpPr>
+        <p:spPr>
+          <a:xfrm>
+            <a:off x="10103859" y="2505456"/>
+            <a:ext cx="1493476" cy="457200"/>
+          </a:xfrm>
+          <a:prstGeom prst="rect">
+            <a:avLst/>
+          </a:prstGeom>
+          <a:noFill/>
+          <a:ln/>
+        </p:spPr>
+        <p:txBody>
+          <a:bodyPr wrap="square" lIns="0" tIns="0" rIns="0" bIns="0" rtlCol="0" anchor="t"/>
+          <a:lstStyle/>
+          <a:p>
+            <a:pPr algn="ctr" indent="0" marL="0">
+              <a:buNone/>
+            </a:pPr>
+            <a:r>
+              <a:rPr lang="en-US" sz="1150" b="1" dirty="0">
+                <a:solidFill>
+                  <a:srgbClr val="F4F8FB"/>
+                </a:solidFill>
+                <a:latin typeface="Calibri" pitchFamily="34" charset="0"/>
+                <a:ea typeface="Calibri" pitchFamily="34" charset="-122"/>
+                <a:cs typeface="Calibri" pitchFamily="34" charset="-120"/>
+              </a:rPr>
+              <a:t>공정</a:t>
+            </a:r>
+            <a:endParaRPr lang="en-US" sz="1150" dirty="0"/>
+          </a:p>
+        </p:txBody>
+      </p:sp>
+      <p:sp>
+        <p:nvSpPr>
+          <p:cNvPr id="43" name="Shape 33"/>
+          <p:cNvSpPr/>
+          <p:nvPr/>
+        </p:nvSpPr>
+        <p:spPr>
+          <a:xfrm>
+            <a:off x="548640" y="3090672"/>
+            <a:ext cx="3515258" cy="3273552"/>
+          </a:xfrm>
+          <a:prstGeom prst="roundRect">
+            <a:avLst>
+              <a:gd name="adj" fmla="val 2514"/>
+            </a:avLst>
+          </a:prstGeom>
+          <a:solidFill>
+            <a:srgbClr val="0F4468"/>
+          </a:solidFill>
+          <a:ln w="9525">
             <a:solidFill>
               <a:srgbClr val="1C7293"/>
             </a:solidFill>
             <a:prstDash val="solid"/>
           </a:ln>
-        </p:spPr>
-      </p:sp>
-      <p:sp>
-        <p:nvSpPr>
-          <p:cNvPr id="5" name="Shape 3"/>
+          <a:effectLst>
+            <a:outerShdw sx="100000" sy="100000" kx="0" ky="0" algn="bl" rotWithShape="0" blurRad="88900" dist="38100" dir="5400000">
+              <a:srgbClr val="000000">
+                <a:alpha val="35000"/>
+              </a:srgbClr>
+            </a:outerShdw>
+          </a:effectLst>
+        </p:spPr>
+      </p:sp>
+      <p:sp>
+        <p:nvSpPr>
+          <p:cNvPr id="44" name="Shape 34"/>
           <p:cNvSpPr/>
           <p:nvPr/>
         </p:nvSpPr>
         <p:spPr>
           <a:xfrm>
-            <a:off x="1057634" y="1691640"/>
-            <a:ext cx="566928" cy="566928"/>
+            <a:off x="804672" y="3346704"/>
+            <a:ext cx="457200" cy="457200"/>
           </a:xfrm>
           <a:prstGeom prst="ellipse">
             <a:avLst/>
           </a:prstGeom>
           <a:solidFill>
-            <a:srgbClr val="1C7293"/>
+            <a:srgbClr val="5FD3F3"/>
           </a:solidFill>
           <a:ln/>
-        </p:spPr>
-      </p:sp>
-      <p:sp>
-        <p:nvSpPr>
-          <p:cNvPr id="6" name="Text 4"/>
+          <a:effectLst>
+            <a:outerShdw sx="100000" sy="100000" kx="0" ky="0" algn="bl" rotWithShape="0" blurRad="50800" dist="25400" dir="5400000">
+              <a:srgbClr val="000000">
+                <a:alpha val="30000"/>
+              </a:srgbClr>
+            </a:outerShdw>
+          </a:effectLst>
+        </p:spPr>
+      </p:sp>
+      <p:pic>
+        <p:nvPicPr>
+          <p:cNvPr id="45" name="Image 8" descr="/tmp/claude-0/-home-user-education/1a4dac63-0322-5893-ae55-dbf45817515a/scratchpad/pptx_onepager/icon_card_market.png">    </p:cNvPr>
+          <p:cNvPicPr>
+            <a:picLocks noChangeAspect="1"/>
+          </p:cNvPicPr>
+          <p:nvPr/>
+        </p:nvPicPr>
+        <p:blipFill>
+          <a:blip r:embed="rId10"/>
+          <a:stretch>
+            <a:fillRect/>
+          </a:stretch>
+        </p:blipFill>
+        <p:spPr>
+          <a:xfrm>
+            <a:off x="905256" y="3447288"/>
+            <a:ext cx="256032" cy="256032"/>
+          </a:xfrm>
+          <a:prstGeom prst="rect">
+            <a:avLst/>
+          </a:prstGeom>
+        </p:spPr>
+      </p:pic>
+      <p:sp>
+        <p:nvSpPr>
+          <p:cNvPr id="46" name="Text 35"/>
           <p:cNvSpPr txBox="1"/>
           <p:nvPr/>
         </p:nvSpPr>
         <p:spPr>
           <a:xfrm>
-            <a:off x="1057634" y="1691640"/>
-            <a:ext cx="566928" cy="566928"/>
+            <a:off x="1389888" y="3328416"/>
+            <a:ext cx="2509418" cy="457200"/>
           </a:xfrm>
           <a:prstGeom prst="rect">
             <a:avLst/>
@@ -1017,11 +2352,57 @@
           <a:bodyPr wrap="square" lIns="0" tIns="0" rIns="0" bIns="0" rtlCol="0" anchor="ctr"/>
           <a:lstStyle/>
           <a:p>
-            <a:pPr algn="ctr" indent="0" marL="0">
+            <a:pPr algn="l" indent="0" marL="0">
               <a:buNone/>
             </a:pPr>
             <a:r>
-              <a:rPr lang="en-US" sz="1600" b="1" dirty="0">
+              <a:rPr lang="en-US" sz="1650" b="1" dirty="0">
+                <a:solidFill>
+                  <a:srgbClr val="F4F8FB"/>
+                </a:solidFill>
+                <a:latin typeface="Cambria" pitchFamily="34" charset="0"/>
+                <a:ea typeface="Cambria" pitchFamily="34" charset="-122"/>
+                <a:cs typeface="Cambria" pitchFamily="34" charset="-120"/>
+              </a:rPr>
+              <a:t>왜 전략물자인가</a:t>
+            </a:r>
+            <a:endParaRPr lang="en-US" sz="1650" dirty="0"/>
+          </a:p>
+        </p:txBody>
+      </p:sp>
+      <p:sp>
+        <p:nvSpPr>
+          <p:cNvPr id="47" name="Text 36"/>
+          <p:cNvSpPr txBox="1"/>
+          <p:nvPr/>
+        </p:nvSpPr>
+        <p:spPr>
+          <a:xfrm>
+            <a:off x="822960" y="4005072"/>
+            <a:ext cx="2966618" cy="2130552"/>
+          </a:xfrm>
+          <a:prstGeom prst="rect">
+            <a:avLst/>
+          </a:prstGeom>
+          <a:noFill/>
+          <a:ln/>
+        </p:spPr>
+        <p:txBody>
+          <a:bodyPr wrap="square" lIns="0" tIns="0" rIns="0" bIns="0" rtlCol="0" anchor="t"/>
+          <a:lstStyle/>
+          <a:p>
+            <a:pPr algn="l" marL="177800" indent="-177800">
+              <a:lnSpc>
+                <a:spcPct val="116000"/>
+              </a:lnSpc>
+              <a:spcAft>
+                <a:spcPts val="1300"/>
+              </a:spcAft>
+              <a:buSzPct val="100000"/>
+              <a:buChar char="•"/>
+            </a:pPr>
+            <a:r>
+              <a:rPr lang="en-US" sz="1200" dirty="0">
                 <a:solidFill>
                   <a:srgbClr val="F4F8FB"/>
                 </a:solidFill>
@@ -1029,38 +2410,23 @@
                 <a:ea typeface="Calibri" pitchFamily="34" charset="-122"/>
                 <a:cs typeface="Calibri" pitchFamily="34" charset="-120"/>
               </a:rPr>
-              <a:t>1</a:t>
-            </a:r>
-            <a:endParaRPr lang="en-US" sz="1600" dirty="0"/>
-          </a:p>
-        </p:txBody>
-      </p:sp>
-      <p:sp>
-        <p:nvSpPr>
-          <p:cNvPr id="7" name="Text 5"/>
-          <p:cNvSpPr txBox="1"/>
-          <p:nvPr/>
-        </p:nvSpPr>
-        <p:spPr>
-          <a:xfrm>
-            <a:off x="594360" y="2331720"/>
-            <a:ext cx="1493476" cy="502920"/>
-          </a:xfrm>
-          <a:prstGeom prst="rect">
-            <a:avLst/>
-          </a:prstGeom>
-          <a:noFill/>
-          <a:ln/>
-        </p:spPr>
-        <p:txBody>
-          <a:bodyPr wrap="square" lIns="0" tIns="0" rIns="0" bIns="0" rtlCol="0" anchor="t"/>
-          <a:lstStyle/>
-          <a:p>
-            <a:pPr algn="ctr" indent="0" marL="0">
-              <a:buNone/>
-            </a:pPr>
-            <a:r>
-              <a:rPr lang="en-US" sz="1150" b="1" dirty="0">
+              <a:t>AI·HBM향 팹 증설 + 미세화로 사용량 구조적 증가</a:t>
+            </a:r>
+            <a:endParaRPr lang="en-US" sz="1200" dirty="0"/>
+          </a:p>
+          <a:p>
+            <a:pPr algn="l" marL="177800" indent="-177800">
+              <a:lnSpc>
+                <a:spcPct val="116000"/>
+              </a:lnSpc>
+              <a:spcAft>
+                <a:spcPts val="1300"/>
+              </a:spcAft>
+              <a:buSzPct val="100000"/>
+              <a:buChar char="•"/>
+            </a:pPr>
+            <a:r>
+              <a:rPr lang="en-US" sz="1200" dirty="0">
                 <a:solidFill>
                   <a:srgbClr val="F4F8FB"/>
                 </a:solidFill>
@@ -1068,65 +2434,131 @@
                 <a:ea typeface="Calibri" pitchFamily="34" charset="-122"/>
                 <a:cs typeface="Calibri" pitchFamily="34" charset="-120"/>
               </a:rPr>
-              <a:t>원료</a:t>
-            </a:r>
-            <a:endParaRPr lang="en-US" sz="1150" dirty="0"/>
-          </a:p>
-        </p:txBody>
-      </p:sp>
-      <p:sp>
-        <p:nvSpPr>
-          <p:cNvPr id="8" name="Shape 6"/>
+              <a:t>최근 몇 년간, 거의 매년 지정학적 공급망 이슈 발생</a:t>
+            </a:r>
+            <a:endParaRPr lang="en-US" sz="1200" dirty="0"/>
+          </a:p>
+          <a:p>
+            <a:pPr algn="l" marL="177800" indent="-177800">
+              <a:lnSpc>
+                <a:spcPct val="116000"/>
+              </a:lnSpc>
+              <a:spcAft>
+                <a:spcPts val="1300"/>
+              </a:spcAft>
+              <a:buSzPct val="100000"/>
+              <a:buChar char="•"/>
+            </a:pPr>
+            <a:r>
+              <a:rPr lang="en-US" sz="1200" dirty="0">
+                <a:solidFill>
+                  <a:srgbClr val="F4F8FB"/>
+                </a:solidFill>
+                <a:latin typeface="Calibri" pitchFamily="34" charset="0"/>
+                <a:ea typeface="Calibri" pitchFamily="34" charset="-122"/>
+                <a:cs typeface="Calibri" pitchFamily="34" charset="-120"/>
+              </a:rPr>
+              <a:t>특정국 의존도를 낮추는 다변화·국산화가 핵심 과제</a:t>
+            </a:r>
+            <a:endParaRPr lang="en-US" sz="1200" dirty="0"/>
+          </a:p>
+        </p:txBody>
+      </p:sp>
+      <p:sp>
+        <p:nvSpPr>
+          <p:cNvPr id="48" name="Shape 37"/>
           <p:cNvSpPr/>
           <p:nvPr/>
         </p:nvSpPr>
         <p:spPr>
           <a:xfrm>
-            <a:off x="3209479" y="1975104"/>
-            <a:ext cx="1017988" cy="0"/>
-          </a:xfrm>
-          <a:prstGeom prst="line">
-            <a:avLst/>
-          </a:prstGeom>
-          <a:noFill/>
-          <a:ln w="22225">
+            <a:off x="4338218" y="3090672"/>
+            <a:ext cx="3515258" cy="3273552"/>
+          </a:xfrm>
+          <a:prstGeom prst="roundRect">
+            <a:avLst>
+              <a:gd name="adj" fmla="val 2514"/>
+            </a:avLst>
+          </a:prstGeom>
+          <a:solidFill>
+            <a:srgbClr val="0F4468"/>
+          </a:solidFill>
+          <a:ln w="9525">
             <a:solidFill>
               <a:srgbClr val="1C7293"/>
             </a:solidFill>
             <a:prstDash val="solid"/>
           </a:ln>
-        </p:spPr>
-      </p:sp>
-      <p:sp>
-        <p:nvSpPr>
-          <p:cNvPr id="9" name="Shape 7"/>
+          <a:effectLst>
+            <a:outerShdw sx="100000" sy="100000" kx="0" ky="0" algn="bl" rotWithShape="0" blurRad="88900" dist="38100" dir="5400000">
+              <a:srgbClr val="000000">
+                <a:alpha val="35000"/>
+              </a:srgbClr>
+            </a:outerShdw>
+          </a:effectLst>
+        </p:spPr>
+      </p:sp>
+      <p:sp>
+        <p:nvSpPr>
+          <p:cNvPr id="49" name="Shape 38"/>
           <p:cNvSpPr/>
           <p:nvPr/>
         </p:nvSpPr>
         <p:spPr>
           <a:xfrm>
-            <a:off x="2642551" y="1691640"/>
-            <a:ext cx="566928" cy="566928"/>
+            <a:off x="4594250" y="3346704"/>
+            <a:ext cx="457200" cy="457200"/>
           </a:xfrm>
           <a:prstGeom prst="ellipse">
             <a:avLst/>
           </a:prstGeom>
           <a:solidFill>
-            <a:srgbClr val="1C7293"/>
+            <a:srgbClr val="5FD3F3"/>
           </a:solidFill>
           <a:ln/>
-        </p:spPr>
-      </p:sp>
-      <p:sp>
-        <p:nvSpPr>
-          <p:cNvPr id="10" name="Text 8"/>
+          <a:effectLst>
+            <a:outerShdw sx="100000" sy="100000" kx="0" ky="0" algn="bl" rotWithShape="0" blurRad="50800" dist="25400" dir="5400000">
+              <a:srgbClr val="000000">
+                <a:alpha val="30000"/>
+              </a:srgbClr>
+            </a:outerShdw>
+          </a:effectLst>
+        </p:spPr>
+      </p:sp>
+      <p:pic>
+        <p:nvPicPr>
+          <p:cNvPr id="50" name="Image 9" descr="/tmp/claude-0/-home-user-education/1a4dac63-0322-5893-ae55-dbf45817515a/scratchpad/pptx_onepager/icon_card_atom.png">    </p:cNvPr>
+          <p:cNvPicPr>
+            <a:picLocks noChangeAspect="1"/>
+          </p:cNvPicPr>
+          <p:nvPr/>
+        </p:nvPicPr>
+        <p:blipFill>
+          <a:blip r:embed="rId11"/>
+          <a:stretch>
+            <a:fillRect/>
+          </a:stretch>
+        </p:blipFill>
+        <p:spPr>
+          <a:xfrm>
+            <a:off x="4694834" y="3447288"/>
+            <a:ext cx="256032" cy="256032"/>
+          </a:xfrm>
+          <a:prstGeom prst="rect">
+            <a:avLst/>
+          </a:prstGeom>
+        </p:spPr>
+      </p:pic>
+      <p:sp>
+        <p:nvSpPr>
+          <p:cNvPr id="51" name="Text 39"/>
           <p:cNvSpPr txBox="1"/>
           <p:nvPr/>
         </p:nvSpPr>
         <p:spPr>
           <a:xfrm>
-            <a:off x="2642551" y="1691640"/>
-            <a:ext cx="566928" cy="566928"/>
+            <a:off x="5179466" y="3328416"/>
+            <a:ext cx="2509418" cy="457200"/>
           </a:xfrm>
           <a:prstGeom prst="rect">
             <a:avLst/>
@@ -1138,11 +2570,57 @@
           <a:bodyPr wrap="square" lIns="0" tIns="0" rIns="0" bIns="0" rtlCol="0" anchor="ctr"/>
           <a:lstStyle/>
           <a:p>
-            <a:pPr algn="ctr" indent="0" marL="0">
+            <a:pPr algn="l" indent="0" marL="0">
               <a:buNone/>
             </a:pPr>
             <a:r>
-              <a:rPr lang="en-US" sz="1600" b="1" dirty="0">
+              <a:rPr lang="en-US" sz="1650" b="1" dirty="0">
+                <a:solidFill>
+                  <a:srgbClr val="F4F8FB"/>
+                </a:solidFill>
+                <a:latin typeface="Cambria" pitchFamily="34" charset="0"/>
+                <a:ea typeface="Cambria" pitchFamily="34" charset="-122"/>
+                <a:cs typeface="Cambria" pitchFamily="34" charset="-120"/>
+              </a:rPr>
+              <a:t>가스란 무엇인가</a:t>
+            </a:r>
+            <a:endParaRPr lang="en-US" sz="1650" dirty="0"/>
+          </a:p>
+        </p:txBody>
+      </p:sp>
+      <p:sp>
+        <p:nvSpPr>
+          <p:cNvPr id="52" name="Text 40"/>
+          <p:cNvSpPr txBox="1"/>
+          <p:nvPr/>
+        </p:nvSpPr>
+        <p:spPr>
+          <a:xfrm>
+            <a:off x="4612538" y="4005072"/>
+            <a:ext cx="2966618" cy="2130552"/>
+          </a:xfrm>
+          <a:prstGeom prst="rect">
+            <a:avLst/>
+          </a:prstGeom>
+          <a:noFill/>
+          <a:ln/>
+        </p:spPr>
+        <p:txBody>
+          <a:bodyPr wrap="square" lIns="0" tIns="0" rIns="0" bIns="0" rtlCol="0" anchor="t"/>
+          <a:lstStyle/>
+          <a:p>
+            <a:pPr algn="l" marL="177800" indent="-177800">
+              <a:lnSpc>
+                <a:spcPct val="116000"/>
+              </a:lnSpc>
+              <a:spcAft>
+                <a:spcPts val="1300"/>
+              </a:spcAft>
+              <a:buSzPct val="100000"/>
+              <a:buChar char="•"/>
+            </a:pPr>
+            <a:r>
+              <a:rPr lang="en-US" sz="1200" dirty="0">
                 <a:solidFill>
                   <a:srgbClr val="F4F8FB"/>
                 </a:solidFill>
@@ -1150,38 +2628,23 @@
                 <a:ea typeface="Calibri" pitchFamily="34" charset="-122"/>
                 <a:cs typeface="Calibri" pitchFamily="34" charset="-120"/>
               </a:rPr>
-              <a:t>2</a:t>
-            </a:r>
-            <a:endParaRPr lang="en-US" sz="1600" dirty="0"/>
-          </a:p>
-        </p:txBody>
-      </p:sp>
-      <p:sp>
-        <p:nvSpPr>
-          <p:cNvPr id="11" name="Text 9"/>
-          <p:cNvSpPr txBox="1"/>
-          <p:nvPr/>
-        </p:nvSpPr>
-        <p:spPr>
-          <a:xfrm>
-            <a:off x="2179276" y="2331720"/>
-            <a:ext cx="1493476" cy="502920"/>
-          </a:xfrm>
-          <a:prstGeom prst="rect">
-            <a:avLst/>
-          </a:prstGeom>
-          <a:noFill/>
-          <a:ln/>
-        </p:spPr>
-        <p:txBody>
-          <a:bodyPr wrap="square" lIns="0" tIns="0" rIns="0" bIns="0" rtlCol="0" anchor="t"/>
-          <a:lstStyle/>
-          <a:p>
-            <a:pPr algn="ctr" indent="0" marL="0">
-              <a:buNone/>
-            </a:pPr>
-            <a:r>
-              <a:rPr lang="en-US" sz="1150" b="1" dirty="0">
+              <a:t>“그릇에 담을 수 없는, 자유로운 물질”</a:t>
+            </a:r>
+            <a:endParaRPr lang="en-US" sz="1200" dirty="0"/>
+          </a:p>
+          <a:p>
+            <a:pPr algn="l" marL="177800" indent="-177800">
+              <a:lnSpc>
+                <a:spcPct val="116000"/>
+              </a:lnSpc>
+              <a:spcAft>
+                <a:spcPts val="1300"/>
+              </a:spcAft>
+              <a:buSzPct val="100000"/>
+              <a:buChar char="•"/>
+            </a:pPr>
+            <a:r>
+              <a:rPr lang="en-US" sz="1200" dirty="0">
                 <a:solidFill>
                   <a:srgbClr val="F4F8FB"/>
                 </a:solidFill>
@@ -1189,616 +2652,87 @@
                 <a:ea typeface="Calibri" pitchFamily="34" charset="-122"/>
                 <a:cs typeface="Calibri" pitchFamily="34" charset="-120"/>
               </a:rPr>
-              <a:t>합성</a:t>
-            </a:r>
-            <a:endParaRPr lang="en-US" sz="1150" dirty="0"/>
-          </a:p>
-        </p:txBody>
-      </p:sp>
-      <p:sp>
-        <p:nvSpPr>
-          <p:cNvPr id="12" name="Shape 10"/>
+              <a:t>Gas(원래 기체) vs Vapor(증발해서 기체가 된 것)</a:t>
+            </a:r>
+            <a:endParaRPr lang="en-US" sz="1200" dirty="0"/>
+          </a:p>
+          <a:p>
+            <a:pPr algn="l" marL="177800" indent="-177800">
+              <a:lnSpc>
+                <a:spcPct val="116000"/>
+              </a:lnSpc>
+              <a:spcAft>
+                <a:spcPts val="1300"/>
+              </a:spcAft>
+              <a:buSzPct val="100000"/>
+              <a:buChar char="•"/>
+            </a:pPr>
+            <a:r>
+              <a:rPr lang="en-US" sz="1200" dirty="0">
+                <a:solidFill>
+                  <a:srgbClr val="F4F8FB"/>
+                </a:solidFill>
+                <a:latin typeface="Calibri" pitchFamily="34" charset="0"/>
+                <a:ea typeface="Calibri" pitchFamily="34" charset="-122"/>
+                <a:cs typeface="Calibri" pitchFamily="34" charset="-120"/>
+              </a:rPr>
+              <a:t>압축가스: 압력계 = 잔량계 / 액화가스: 무게(중량법) 관리</a:t>
+            </a:r>
+            <a:endParaRPr lang="en-US" sz="1200" dirty="0"/>
+          </a:p>
+          <a:p>
+            <a:pPr algn="l" marL="177800" indent="-177800">
+              <a:lnSpc>
+                <a:spcPct val="116000"/>
+              </a:lnSpc>
+              <a:spcAft>
+                <a:spcPts val="1300"/>
+              </a:spcAft>
+              <a:buSzPct val="100000"/>
+              <a:buChar char="•"/>
+            </a:pPr>
+            <a:r>
+              <a:rPr lang="en-US" sz="1200" dirty="0">
+                <a:solidFill>
+                  <a:srgbClr val="F4F8FB"/>
+                </a:solidFill>
+                <a:latin typeface="Calibri" pitchFamily="34" charset="0"/>
+                <a:ea typeface="Calibri" pitchFamily="34" charset="-122"/>
+                <a:cs typeface="Calibri" pitchFamily="34" charset="-120"/>
+              </a:rPr>
+              <a:t>분류 기준 6가지 — 압력·규모·혼합·상태·성질·공정접촉</a:t>
+            </a:r>
+            <a:endParaRPr lang="en-US" sz="1200" dirty="0"/>
+          </a:p>
+        </p:txBody>
+      </p:sp>
+      <p:sp>
+        <p:nvSpPr>
+          <p:cNvPr id="53" name="Shape 41"/>
           <p:cNvSpPr/>
           <p:nvPr/>
         </p:nvSpPr>
         <p:spPr>
           <a:xfrm>
-            <a:off x="4794395" y="1975104"/>
-            <a:ext cx="1017988" cy="0"/>
-          </a:xfrm>
-          <a:prstGeom prst="line">
-            <a:avLst/>
-          </a:prstGeom>
-          <a:noFill/>
-          <a:ln w="22225">
+            <a:off x="8127797" y="3090672"/>
+            <a:ext cx="3515258" cy="3273552"/>
+          </a:xfrm>
+          <a:prstGeom prst="roundRect">
+            <a:avLst>
+              <a:gd name="adj" fmla="val 2514"/>
+            </a:avLst>
+          </a:prstGeom>
+          <a:solidFill>
+            <a:srgbClr val="0F4468"/>
+          </a:solidFill>
+          <a:ln w="9525">
             <a:solidFill>
               <a:srgbClr val="1C7293"/>
             </a:solidFill>
             <a:prstDash val="solid"/>
           </a:ln>
-        </p:spPr>
-      </p:sp>
-      <p:sp>
-        <p:nvSpPr>
-          <p:cNvPr id="13" name="Shape 11"/>
-          <p:cNvSpPr/>
-          <p:nvPr/>
-        </p:nvSpPr>
-        <p:spPr>
-          <a:xfrm>
-            <a:off x="4227467" y="1691640"/>
-            <a:ext cx="566928" cy="566928"/>
-          </a:xfrm>
-          <a:prstGeom prst="ellipse">
-            <a:avLst/>
-          </a:prstGeom>
-          <a:solidFill>
-            <a:srgbClr val="1C7293"/>
-          </a:solidFill>
-          <a:ln/>
-        </p:spPr>
-      </p:sp>
-      <p:sp>
-        <p:nvSpPr>
-          <p:cNvPr id="14" name="Text 12"/>
-          <p:cNvSpPr txBox="1"/>
-          <p:nvPr/>
-        </p:nvSpPr>
-        <p:spPr>
-          <a:xfrm>
-            <a:off x="4227467" y="1691640"/>
-            <a:ext cx="566928" cy="566928"/>
-          </a:xfrm>
-          <a:prstGeom prst="rect">
-            <a:avLst/>
-          </a:prstGeom>
-          <a:noFill/>
-          <a:ln/>
-        </p:spPr>
-        <p:txBody>
-          <a:bodyPr wrap="square" lIns="0" tIns="0" rIns="0" bIns="0" rtlCol="0" anchor="ctr"/>
-          <a:lstStyle/>
-          <a:p>
-            <a:pPr algn="ctr" indent="0" marL="0">
-              <a:buNone/>
-            </a:pPr>
-            <a:r>
-              <a:rPr lang="en-US" sz="1600" b="1" dirty="0">
-                <a:solidFill>
-                  <a:srgbClr val="F4F8FB"/>
-                </a:solidFill>
-                <a:latin typeface="Calibri" pitchFamily="34" charset="0"/>
-                <a:ea typeface="Calibri" pitchFamily="34" charset="-122"/>
-                <a:cs typeface="Calibri" pitchFamily="34" charset="-120"/>
-              </a:rPr>
-              <a:t>3</a:t>
-            </a:r>
-            <a:endParaRPr lang="en-US" sz="1600" dirty="0"/>
-          </a:p>
-        </p:txBody>
-      </p:sp>
-      <p:sp>
-        <p:nvSpPr>
-          <p:cNvPr id="15" name="Text 13"/>
-          <p:cNvSpPr txBox="1"/>
-          <p:nvPr/>
-        </p:nvSpPr>
-        <p:spPr>
-          <a:xfrm>
-            <a:off x="3764193" y="2331720"/>
-            <a:ext cx="1493476" cy="502920"/>
-          </a:xfrm>
-          <a:prstGeom prst="rect">
-            <a:avLst/>
-          </a:prstGeom>
-          <a:noFill/>
-          <a:ln/>
-        </p:spPr>
-        <p:txBody>
-          <a:bodyPr wrap="square" lIns="0" tIns="0" rIns="0" bIns="0" rtlCol="0" anchor="t"/>
-          <a:lstStyle/>
-          <a:p>
-            <a:pPr algn="ctr" indent="0" marL="0">
-              <a:buNone/>
-            </a:pPr>
-            <a:r>
-              <a:rPr lang="en-US" sz="1150" b="1" dirty="0">
-                <a:solidFill>
-                  <a:srgbClr val="F4F8FB"/>
-                </a:solidFill>
-                <a:latin typeface="Calibri" pitchFamily="34" charset="0"/>
-                <a:ea typeface="Calibri" pitchFamily="34" charset="-122"/>
-                <a:cs typeface="Calibri" pitchFamily="34" charset="-120"/>
-              </a:rPr>
-              <a:t>정제</a:t>
-            </a:r>
-            <a:endParaRPr lang="en-US" sz="1150" dirty="0"/>
-          </a:p>
-        </p:txBody>
-      </p:sp>
-      <p:sp>
-        <p:nvSpPr>
-          <p:cNvPr id="16" name="Shape 14"/>
-          <p:cNvSpPr/>
-          <p:nvPr/>
-        </p:nvSpPr>
-        <p:spPr>
-          <a:xfrm>
-            <a:off x="6379312" y="1975104"/>
-            <a:ext cx="1017988" cy="0"/>
-          </a:xfrm>
-          <a:prstGeom prst="line">
-            <a:avLst/>
-          </a:prstGeom>
-          <a:noFill/>
-          <a:ln w="22225">
-            <a:solidFill>
-              <a:srgbClr val="1C7293"/>
-            </a:solidFill>
-            <a:prstDash val="solid"/>
-          </a:ln>
-        </p:spPr>
-      </p:sp>
-      <p:sp>
-        <p:nvSpPr>
-          <p:cNvPr id="17" name="Shape 15"/>
-          <p:cNvSpPr/>
-          <p:nvPr/>
-        </p:nvSpPr>
-        <p:spPr>
-          <a:xfrm>
-            <a:off x="5812384" y="1691640"/>
-            <a:ext cx="566928" cy="566928"/>
-          </a:xfrm>
-          <a:prstGeom prst="ellipse">
-            <a:avLst/>
-          </a:prstGeom>
-          <a:solidFill>
-            <a:srgbClr val="1C7293"/>
-          </a:solidFill>
-          <a:ln/>
-        </p:spPr>
-      </p:sp>
-      <p:sp>
-        <p:nvSpPr>
-          <p:cNvPr id="18" name="Text 16"/>
-          <p:cNvSpPr txBox="1"/>
-          <p:nvPr/>
-        </p:nvSpPr>
-        <p:spPr>
-          <a:xfrm>
-            <a:off x="5812384" y="1691640"/>
-            <a:ext cx="566928" cy="566928"/>
-          </a:xfrm>
-          <a:prstGeom prst="rect">
-            <a:avLst/>
-          </a:prstGeom>
-          <a:noFill/>
-          <a:ln/>
-        </p:spPr>
-        <p:txBody>
-          <a:bodyPr wrap="square" lIns="0" tIns="0" rIns="0" bIns="0" rtlCol="0" anchor="ctr"/>
-          <a:lstStyle/>
-          <a:p>
-            <a:pPr algn="ctr" indent="0" marL="0">
-              <a:buNone/>
-            </a:pPr>
-            <a:r>
-              <a:rPr lang="en-US" sz="1600" b="1" dirty="0">
-                <a:solidFill>
-                  <a:srgbClr val="F4F8FB"/>
-                </a:solidFill>
-                <a:latin typeface="Calibri" pitchFamily="34" charset="0"/>
-                <a:ea typeface="Calibri" pitchFamily="34" charset="-122"/>
-                <a:cs typeface="Calibri" pitchFamily="34" charset="-120"/>
-              </a:rPr>
-              <a:t>4</a:t>
-            </a:r>
-            <a:endParaRPr lang="en-US" sz="1600" dirty="0"/>
-          </a:p>
-        </p:txBody>
-      </p:sp>
-      <p:sp>
-        <p:nvSpPr>
-          <p:cNvPr id="19" name="Text 17"/>
-          <p:cNvSpPr txBox="1"/>
-          <p:nvPr/>
-        </p:nvSpPr>
-        <p:spPr>
-          <a:xfrm>
-            <a:off x="5349109" y="2331720"/>
-            <a:ext cx="1493476" cy="502920"/>
-          </a:xfrm>
-          <a:prstGeom prst="rect">
-            <a:avLst/>
-          </a:prstGeom>
-          <a:noFill/>
-          <a:ln/>
-        </p:spPr>
-        <p:txBody>
-          <a:bodyPr wrap="square" lIns="0" tIns="0" rIns="0" bIns="0" rtlCol="0" anchor="t"/>
-          <a:lstStyle/>
-          <a:p>
-            <a:pPr algn="ctr" indent="0" marL="0">
-              <a:buNone/>
-            </a:pPr>
-            <a:r>
-              <a:rPr lang="en-US" sz="1150" b="1" dirty="0">
-                <a:solidFill>
-                  <a:srgbClr val="F4F8FB"/>
-                </a:solidFill>
-                <a:latin typeface="Calibri" pitchFamily="34" charset="0"/>
-                <a:ea typeface="Calibri" pitchFamily="34" charset="-122"/>
-                <a:cs typeface="Calibri" pitchFamily="34" charset="-120"/>
-              </a:rPr>
-              <a:t>충전/믹싱</a:t>
-            </a:r>
-            <a:endParaRPr lang="en-US" sz="1150" dirty="0"/>
-          </a:p>
-        </p:txBody>
-      </p:sp>
-      <p:sp>
-        <p:nvSpPr>
-          <p:cNvPr id="20" name="Shape 18"/>
-          <p:cNvSpPr/>
-          <p:nvPr/>
-        </p:nvSpPr>
-        <p:spPr>
-          <a:xfrm>
-            <a:off x="7964228" y="1975104"/>
-            <a:ext cx="1017988" cy="0"/>
-          </a:xfrm>
-          <a:prstGeom prst="line">
-            <a:avLst/>
-          </a:prstGeom>
-          <a:noFill/>
-          <a:ln w="22225">
-            <a:solidFill>
-              <a:srgbClr val="1C7293"/>
-            </a:solidFill>
-            <a:prstDash val="solid"/>
-          </a:ln>
-        </p:spPr>
-      </p:sp>
-      <p:sp>
-        <p:nvSpPr>
-          <p:cNvPr id="21" name="Shape 19"/>
-          <p:cNvSpPr/>
-          <p:nvPr/>
-        </p:nvSpPr>
-        <p:spPr>
-          <a:xfrm>
-            <a:off x="7397300" y="1691640"/>
-            <a:ext cx="566928" cy="566928"/>
-          </a:xfrm>
-          <a:prstGeom prst="ellipse">
-            <a:avLst/>
-          </a:prstGeom>
-          <a:solidFill>
-            <a:srgbClr val="1C7293"/>
-          </a:solidFill>
-          <a:ln/>
-        </p:spPr>
-      </p:sp>
-      <p:sp>
-        <p:nvSpPr>
-          <p:cNvPr id="22" name="Text 20"/>
-          <p:cNvSpPr txBox="1"/>
-          <p:nvPr/>
-        </p:nvSpPr>
-        <p:spPr>
-          <a:xfrm>
-            <a:off x="7397300" y="1691640"/>
-            <a:ext cx="566928" cy="566928"/>
-          </a:xfrm>
-          <a:prstGeom prst="rect">
-            <a:avLst/>
-          </a:prstGeom>
-          <a:noFill/>
-          <a:ln/>
-        </p:spPr>
-        <p:txBody>
-          <a:bodyPr wrap="square" lIns="0" tIns="0" rIns="0" bIns="0" rtlCol="0" anchor="ctr"/>
-          <a:lstStyle/>
-          <a:p>
-            <a:pPr algn="ctr" indent="0" marL="0">
-              <a:buNone/>
-            </a:pPr>
-            <a:r>
-              <a:rPr lang="en-US" sz="1600" b="1" dirty="0">
-                <a:solidFill>
-                  <a:srgbClr val="F4F8FB"/>
-                </a:solidFill>
-                <a:latin typeface="Calibri" pitchFamily="34" charset="0"/>
-                <a:ea typeface="Calibri" pitchFamily="34" charset="-122"/>
-                <a:cs typeface="Calibri" pitchFamily="34" charset="-120"/>
-              </a:rPr>
-              <a:t>5</a:t>
-            </a:r>
-            <a:endParaRPr lang="en-US" sz="1600" dirty="0"/>
-          </a:p>
-        </p:txBody>
-      </p:sp>
-      <p:sp>
-        <p:nvSpPr>
-          <p:cNvPr id="23" name="Text 21"/>
-          <p:cNvSpPr txBox="1"/>
-          <p:nvPr/>
-        </p:nvSpPr>
-        <p:spPr>
-          <a:xfrm>
-            <a:off x="6934026" y="2331720"/>
-            <a:ext cx="1493476" cy="502920"/>
-          </a:xfrm>
-          <a:prstGeom prst="rect">
-            <a:avLst/>
-          </a:prstGeom>
-          <a:noFill/>
-          <a:ln/>
-        </p:spPr>
-        <p:txBody>
-          <a:bodyPr wrap="square" lIns="0" tIns="0" rIns="0" bIns="0" rtlCol="0" anchor="t"/>
-          <a:lstStyle/>
-          <a:p>
-            <a:pPr algn="ctr" indent="0" marL="0">
-              <a:buNone/>
-            </a:pPr>
-            <a:r>
-              <a:rPr lang="en-US" sz="1150" b="1" dirty="0">
-                <a:solidFill>
-                  <a:srgbClr val="F4F8FB"/>
-                </a:solidFill>
-                <a:latin typeface="Calibri" pitchFamily="34" charset="0"/>
-                <a:ea typeface="Calibri" pitchFamily="34" charset="-122"/>
-                <a:cs typeface="Calibri" pitchFamily="34" charset="-120"/>
-              </a:rPr>
-              <a:t>분석</a:t>
-            </a:r>
-            <a:endParaRPr lang="en-US" sz="1150" dirty="0"/>
-          </a:p>
-        </p:txBody>
-      </p:sp>
-      <p:sp>
-        <p:nvSpPr>
-          <p:cNvPr id="24" name="Shape 22"/>
-          <p:cNvSpPr/>
-          <p:nvPr/>
-        </p:nvSpPr>
-        <p:spPr>
-          <a:xfrm>
-            <a:off x="9549145" y="1975104"/>
-            <a:ext cx="1017988" cy="0"/>
-          </a:xfrm>
-          <a:prstGeom prst="line">
-            <a:avLst/>
-          </a:prstGeom>
-          <a:noFill/>
-          <a:ln w="22225">
-            <a:solidFill>
-              <a:srgbClr val="1C7293"/>
-            </a:solidFill>
-            <a:prstDash val="solid"/>
-          </a:ln>
-        </p:spPr>
-      </p:sp>
-      <p:sp>
-        <p:nvSpPr>
-          <p:cNvPr id="25" name="Shape 23"/>
-          <p:cNvSpPr/>
-          <p:nvPr/>
-        </p:nvSpPr>
-        <p:spPr>
-          <a:xfrm>
-            <a:off x="8982217" y="1691640"/>
-            <a:ext cx="566928" cy="566928"/>
-          </a:xfrm>
-          <a:prstGeom prst="ellipse">
-            <a:avLst/>
-          </a:prstGeom>
-          <a:solidFill>
-            <a:srgbClr val="1C7293"/>
-          </a:solidFill>
-          <a:ln/>
-        </p:spPr>
-      </p:sp>
-      <p:sp>
-        <p:nvSpPr>
-          <p:cNvPr id="26" name="Text 24"/>
-          <p:cNvSpPr txBox="1"/>
-          <p:nvPr/>
-        </p:nvSpPr>
-        <p:spPr>
-          <a:xfrm>
-            <a:off x="8982217" y="1691640"/>
-            <a:ext cx="566928" cy="566928"/>
-          </a:xfrm>
-          <a:prstGeom prst="rect">
-            <a:avLst/>
-          </a:prstGeom>
-          <a:noFill/>
-          <a:ln/>
-        </p:spPr>
-        <p:txBody>
-          <a:bodyPr wrap="square" lIns="0" tIns="0" rIns="0" bIns="0" rtlCol="0" anchor="ctr"/>
-          <a:lstStyle/>
-          <a:p>
-            <a:pPr algn="ctr" indent="0" marL="0">
-              <a:buNone/>
-            </a:pPr>
-            <a:r>
-              <a:rPr lang="en-US" sz="1600" b="1" dirty="0">
-                <a:solidFill>
-                  <a:srgbClr val="F4F8FB"/>
-                </a:solidFill>
-                <a:latin typeface="Calibri" pitchFamily="34" charset="0"/>
-                <a:ea typeface="Calibri" pitchFamily="34" charset="-122"/>
-                <a:cs typeface="Calibri" pitchFamily="34" charset="-120"/>
-              </a:rPr>
-              <a:t>6</a:t>
-            </a:r>
-            <a:endParaRPr lang="en-US" sz="1600" dirty="0"/>
-          </a:p>
-        </p:txBody>
-      </p:sp>
-      <p:sp>
-        <p:nvSpPr>
-          <p:cNvPr id="27" name="Text 25"/>
-          <p:cNvSpPr txBox="1"/>
-          <p:nvPr/>
-        </p:nvSpPr>
-        <p:spPr>
-          <a:xfrm>
-            <a:off x="8518942" y="2331720"/>
-            <a:ext cx="1493476" cy="502920"/>
-          </a:xfrm>
-          <a:prstGeom prst="rect">
-            <a:avLst/>
-          </a:prstGeom>
-          <a:noFill/>
-          <a:ln/>
-        </p:spPr>
-        <p:txBody>
-          <a:bodyPr wrap="square" lIns="0" tIns="0" rIns="0" bIns="0" rtlCol="0" anchor="t"/>
-          <a:lstStyle/>
-          <a:p>
-            <a:pPr algn="ctr" indent="0" marL="0">
-              <a:buNone/>
-            </a:pPr>
-            <a:r>
-              <a:rPr lang="en-US" sz="1150" b="1" dirty="0">
-                <a:solidFill>
-                  <a:srgbClr val="F4F8FB"/>
-                </a:solidFill>
-                <a:latin typeface="Calibri" pitchFamily="34" charset="0"/>
-                <a:ea typeface="Calibri" pitchFamily="34" charset="-122"/>
-                <a:cs typeface="Calibri" pitchFamily="34" charset="-120"/>
-              </a:rPr>
-              <a:t>공급</a:t>
-            </a:r>
-            <a:endParaRPr lang="en-US" sz="1150" dirty="0"/>
-          </a:p>
-        </p:txBody>
-      </p:sp>
-      <p:sp>
-        <p:nvSpPr>
-          <p:cNvPr id="28" name="Shape 26"/>
-          <p:cNvSpPr/>
-          <p:nvPr/>
-        </p:nvSpPr>
-        <p:spPr>
-          <a:xfrm>
-            <a:off x="10567133" y="1691640"/>
-            <a:ext cx="566928" cy="566928"/>
-          </a:xfrm>
-          <a:prstGeom prst="ellipse">
-            <a:avLst/>
-          </a:prstGeom>
-          <a:solidFill>
-            <a:srgbClr val="5FD3F3"/>
-          </a:solidFill>
-          <a:ln/>
-        </p:spPr>
-      </p:sp>
-      <p:sp>
-        <p:nvSpPr>
-          <p:cNvPr id="29" name="Text 27"/>
-          <p:cNvSpPr txBox="1"/>
-          <p:nvPr/>
-        </p:nvSpPr>
-        <p:spPr>
-          <a:xfrm>
-            <a:off x="10567133" y="1691640"/>
-            <a:ext cx="566928" cy="566928"/>
-          </a:xfrm>
-          <a:prstGeom prst="rect">
-            <a:avLst/>
-          </a:prstGeom>
-          <a:noFill/>
-          <a:ln/>
-        </p:spPr>
-        <p:txBody>
-          <a:bodyPr wrap="square" lIns="0" tIns="0" rIns="0" bIns="0" rtlCol="0" anchor="ctr"/>
-          <a:lstStyle/>
-          <a:p>
-            <a:pPr algn="ctr" indent="0" marL="0">
-              <a:buNone/>
-            </a:pPr>
-            <a:r>
-              <a:rPr lang="en-US" sz="1600" b="1" dirty="0">
-                <a:solidFill>
-                  <a:srgbClr val="0B3D62"/>
-                </a:solidFill>
-                <a:latin typeface="Calibri" pitchFamily="34" charset="0"/>
-                <a:ea typeface="Calibri" pitchFamily="34" charset="-122"/>
-                <a:cs typeface="Calibri" pitchFamily="34" charset="-120"/>
-              </a:rPr>
-              <a:t>7</a:t>
-            </a:r>
-            <a:endParaRPr lang="en-US" sz="1600" dirty="0"/>
-          </a:p>
-        </p:txBody>
-      </p:sp>
-      <p:sp>
-        <p:nvSpPr>
-          <p:cNvPr id="30" name="Text 28"/>
-          <p:cNvSpPr txBox="1"/>
-          <p:nvPr/>
-        </p:nvSpPr>
-        <p:spPr>
-          <a:xfrm>
-            <a:off x="10103859" y="2331720"/>
-            <a:ext cx="1493476" cy="502920"/>
-          </a:xfrm>
-          <a:prstGeom prst="rect">
-            <a:avLst/>
-          </a:prstGeom>
-          <a:noFill/>
-          <a:ln/>
-        </p:spPr>
-        <p:txBody>
-          <a:bodyPr wrap="square" lIns="0" tIns="0" rIns="0" bIns="0" rtlCol="0" anchor="t"/>
-          <a:lstStyle/>
-          <a:p>
-            <a:pPr algn="ctr" indent="0" marL="0">
-              <a:buNone/>
-            </a:pPr>
-            <a:r>
-              <a:rPr lang="en-US" sz="1150" b="1" dirty="0">
-                <a:solidFill>
-                  <a:srgbClr val="F4F8FB"/>
-                </a:solidFill>
-                <a:latin typeface="Calibri" pitchFamily="34" charset="0"/>
-                <a:ea typeface="Calibri" pitchFamily="34" charset="-122"/>
-                <a:cs typeface="Calibri" pitchFamily="34" charset="-120"/>
-              </a:rPr>
-              <a:t>공정</a:t>
-            </a:r>
-            <a:endParaRPr lang="en-US" sz="1150" dirty="0"/>
-          </a:p>
-        </p:txBody>
-      </p:sp>
-      <p:sp>
-        <p:nvSpPr>
-          <p:cNvPr id="31" name="Shape 29"/>
-          <p:cNvSpPr/>
-          <p:nvPr/>
-        </p:nvSpPr>
-        <p:spPr>
-          <a:xfrm>
-            <a:off x="548640" y="3063240"/>
-            <a:ext cx="3515258" cy="3246120"/>
-          </a:xfrm>
-          <a:prstGeom prst="roundRect">
-            <a:avLst>
-              <a:gd name="adj" fmla="val 2254"/>
-            </a:avLst>
-          </a:prstGeom>
-          <a:solidFill>
-            <a:srgbClr val="133E63"/>
-          </a:solidFill>
-          <a:ln/>
           <a:effectLst>
-            <a:outerShdw sx="100000" sy="100000" kx="0" ky="0" algn="bl" rotWithShape="0" blurRad="76200" dist="38100" dir="5400000">
+            <a:outerShdw sx="100000" sy="100000" kx="0" ky="0" algn="bl" rotWithShape="0" blurRad="88900" dist="38100" dir="5400000">
               <a:srgbClr val="000000">
                 <a:alpha val="35000"/>
               </a:srgbClr>
@@ -1808,14 +2742,14 @@
       </p:sp>
       <p:sp>
         <p:nvSpPr>
-          <p:cNvPr id="32" name="Shape 30"/>
+          <p:cNvPr id="54" name="Shape 42"/>
           <p:cNvSpPr/>
           <p:nvPr/>
         </p:nvSpPr>
         <p:spPr>
           <a:xfrm>
-            <a:off x="804672" y="3319272"/>
-            <a:ext cx="384048" cy="384048"/>
+            <a:off x="8383829" y="3346704"/>
+            <a:ext cx="457200" cy="457200"/>
           </a:xfrm>
           <a:prstGeom prst="ellipse">
             <a:avLst/>
@@ -1824,18 +2758,49 @@
             <a:srgbClr val="5FD3F3"/>
           </a:solidFill>
           <a:ln/>
-        </p:spPr>
-      </p:sp>
-      <p:sp>
-        <p:nvSpPr>
-          <p:cNvPr id="33" name="Text 31"/>
+          <a:effectLst>
+            <a:outerShdw sx="100000" sy="100000" kx="0" ky="0" algn="bl" rotWithShape="0" blurRad="50800" dist="25400" dir="5400000">
+              <a:srgbClr val="000000">
+                <a:alpha val="30000"/>
+              </a:srgbClr>
+            </a:outerShdw>
+          </a:effectLst>
+        </p:spPr>
+      </p:sp>
+      <p:pic>
+        <p:nvPicPr>
+          <p:cNvPr id="55" name="Image 10" descr="/tmp/claude-0/-home-user-education/1a4dac63-0322-5893-ae55-dbf45817515a/scratchpad/pptx_onepager/icon_card_shield.png">    </p:cNvPr>
+          <p:cNvPicPr>
+            <a:picLocks noChangeAspect="1"/>
+          </p:cNvPicPr>
+          <p:nvPr/>
+        </p:nvPicPr>
+        <p:blipFill>
+          <a:blip r:embed="rId12"/>
+          <a:stretch>
+            <a:fillRect/>
+          </a:stretch>
+        </p:blipFill>
+        <p:spPr>
+          <a:xfrm>
+            <a:off x="8484413" y="3447288"/>
+            <a:ext cx="256032" cy="256032"/>
+          </a:xfrm>
+          <a:prstGeom prst="rect">
+            <a:avLst/>
+          </a:prstGeom>
+        </p:spPr>
+      </p:pic>
+      <p:sp>
+        <p:nvSpPr>
+          <p:cNvPr id="56" name="Text 43"/>
           <p:cNvSpPr txBox="1"/>
           <p:nvPr/>
         </p:nvSpPr>
         <p:spPr>
           <a:xfrm>
-            <a:off x="804672" y="3319272"/>
-            <a:ext cx="384048" cy="384048"/>
+            <a:off x="8969045" y="3328416"/>
+            <a:ext cx="2509418" cy="457200"/>
           </a:xfrm>
           <a:prstGeom prst="rect">
             <a:avLst/>
@@ -1847,96 +2812,81 @@
           <a:bodyPr wrap="square" lIns="0" tIns="0" rIns="0" bIns="0" rtlCol="0" anchor="ctr"/>
           <a:lstStyle/>
           <a:p>
-            <a:pPr algn="ctr" indent="0" marL="0">
+            <a:pPr algn="l" indent="0" marL="0">
               <a:buNone/>
             </a:pPr>
             <a:r>
-              <a:rPr lang="en-US" sz="1600" b="1" dirty="0">
-                <a:solidFill>
-                  <a:srgbClr val="0B3D62"/>
+              <a:rPr lang="en-US" sz="1650" b="1" dirty="0">
+                <a:solidFill>
+                  <a:srgbClr val="F4F8FB"/>
+                </a:solidFill>
+                <a:latin typeface="Cambria" pitchFamily="34" charset="0"/>
+                <a:ea typeface="Cambria" pitchFamily="34" charset="-122"/>
+                <a:cs typeface="Cambria" pitchFamily="34" charset="-120"/>
+              </a:rPr>
+              <a:t>어떻게 관리하는가</a:t>
+            </a:r>
+            <a:endParaRPr lang="en-US" sz="1650" dirty="0"/>
+          </a:p>
+        </p:txBody>
+      </p:sp>
+      <p:sp>
+        <p:nvSpPr>
+          <p:cNvPr id="57" name="Text 44"/>
+          <p:cNvSpPr txBox="1"/>
+          <p:nvPr/>
+        </p:nvSpPr>
+        <p:spPr>
+          <a:xfrm>
+            <a:off x="8402117" y="4005072"/>
+            <a:ext cx="2966618" cy="2130552"/>
+          </a:xfrm>
+          <a:prstGeom prst="rect">
+            <a:avLst/>
+          </a:prstGeom>
+          <a:noFill/>
+          <a:ln/>
+        </p:spPr>
+        <p:txBody>
+          <a:bodyPr wrap="square" lIns="0" tIns="0" rIns="0" bIns="0" rtlCol="0" anchor="t"/>
+          <a:lstStyle/>
+          <a:p>
+            <a:pPr algn="l" marL="177800" indent="-177800">
+              <a:lnSpc>
+                <a:spcPct val="116000"/>
+              </a:lnSpc>
+              <a:spcAft>
+                <a:spcPts val="1300"/>
+              </a:spcAft>
+              <a:buSzPct val="100000"/>
+              <a:buChar char="•"/>
+            </a:pPr>
+            <a:r>
+              <a:rPr lang="en-US" sz="1200" dirty="0">
+                <a:solidFill>
+                  <a:srgbClr val="F4F8FB"/>
                 </a:solidFill>
                 <a:latin typeface="Calibri" pitchFamily="34" charset="0"/>
                 <a:ea typeface="Calibri" pitchFamily="34" charset="-122"/>
                 <a:cs typeface="Calibri" pitchFamily="34" charset="-120"/>
               </a:rPr>
-              <a:t>1</a:t>
-            </a:r>
-            <a:endParaRPr lang="en-US" sz="1600" dirty="0"/>
-          </a:p>
-        </p:txBody>
-      </p:sp>
-      <p:sp>
-        <p:nvSpPr>
-          <p:cNvPr id="34" name="Text 32"/>
-          <p:cNvSpPr txBox="1"/>
-          <p:nvPr/>
-        </p:nvSpPr>
-        <p:spPr>
-          <a:xfrm>
-            <a:off x="1298448" y="3300984"/>
-            <a:ext cx="2600858" cy="384048"/>
-          </a:xfrm>
-          <a:prstGeom prst="rect">
-            <a:avLst/>
-          </a:prstGeom>
-          <a:noFill/>
-          <a:ln/>
-        </p:spPr>
-        <p:txBody>
-          <a:bodyPr wrap="square" lIns="0" tIns="0" rIns="0" bIns="0" rtlCol="0" anchor="ctr"/>
-          <a:lstStyle/>
-          <a:p>
-            <a:pPr algn="l" indent="0" marL="0">
-              <a:buNone/>
-            </a:pPr>
-            <a:r>
-              <a:rPr lang="en-US" sz="1600" b="1" dirty="0">
-                <a:solidFill>
-                  <a:srgbClr val="F4F8FB"/>
-                </a:solidFill>
-                <a:latin typeface="Cambria" pitchFamily="34" charset="0"/>
-                <a:ea typeface="Cambria" pitchFamily="34" charset="-122"/>
-                <a:cs typeface="Cambria" pitchFamily="34" charset="-120"/>
-              </a:rPr>
-              <a:t>왜 전략물자인가</a:t>
-            </a:r>
-            <a:endParaRPr lang="en-US" sz="1600" dirty="0"/>
-          </a:p>
-        </p:txBody>
-      </p:sp>
-      <p:sp>
-        <p:nvSpPr>
-          <p:cNvPr id="35" name="Text 33"/>
-          <p:cNvSpPr txBox="1"/>
-          <p:nvPr/>
-        </p:nvSpPr>
-        <p:spPr>
-          <a:xfrm>
-            <a:off x="822960" y="3931920"/>
-            <a:ext cx="2966618" cy="2148840"/>
-          </a:xfrm>
-          <a:prstGeom prst="rect">
-            <a:avLst/>
-          </a:prstGeom>
-          <a:noFill/>
-          <a:ln/>
-        </p:spPr>
-        <p:txBody>
-          <a:bodyPr wrap="square" lIns="0" tIns="0" rIns="0" bIns="0" rtlCol="0" anchor="t"/>
-          <a:lstStyle/>
+              <a:t>제조 흐름: 합성 → 정제 → 충전/믹싱 → 분석 → 출하</a:t>
+            </a:r>
+            <a:endParaRPr lang="en-US" sz="1200" dirty="0"/>
+          </a:p>
           <a:p>
             <a:pPr algn="l" marL="177800" indent="-177800">
               <a:lnSpc>
-                <a:spcPct val="115000"/>
+                <a:spcPct val="116000"/>
               </a:lnSpc>
               <a:spcAft>
-                <a:spcPts val="1200"/>
+                <a:spcPts val="1300"/>
               </a:spcAft>
               <a:buSzPct val="100000"/>
               <a:buChar char="•"/>
             </a:pPr>
             <a:r>
-              <a:rPr lang="en-US" sz="1250" dirty="0">
+              <a:rPr lang="en-US" sz="1200" dirty="0">
                 <a:solidFill>
                   <a:srgbClr val="F4F8FB"/>
                 </a:solidFill>
@@ -1944,23 +2894,23 @@
                 <a:ea typeface="Calibri" pitchFamily="34" charset="-122"/>
                 <a:cs typeface="Calibri" pitchFamily="34" charset="-120"/>
               </a:rPr>
-              <a:t>2025년 116.9억$ → 2034년 224.9억$, 연평균 7.54% 성장</a:t>
-            </a:r>
-            <a:endParaRPr lang="en-US" sz="1250" dirty="0"/>
+              <a:t>불순물 3대 분류 — Air · Metal · 수분</a:t>
+            </a:r>
+            <a:endParaRPr lang="en-US" sz="1200" dirty="0"/>
           </a:p>
           <a:p>
             <a:pPr algn="l" marL="177800" indent="-177800">
               <a:lnSpc>
-                <a:spcPct val="115000"/>
+                <a:spcPct val="116000"/>
               </a:lnSpc>
               <a:spcAft>
-                <a:spcPts val="1200"/>
+                <a:spcPts val="1300"/>
               </a:spcAft>
               <a:buSzPct val="100000"/>
               <a:buChar char="•"/>
             </a:pPr>
             <a:r>
-              <a:rPr lang="en-US" sz="1250" dirty="0">
+              <a:rPr lang="en-US" sz="1200" dirty="0">
                 <a:solidFill>
                   <a:srgbClr val="F4F8FB"/>
                 </a:solidFill>
@@ -1968,23 +2918,23 @@
                 <a:ea typeface="Calibri" pitchFamily="34" charset="-122"/>
                 <a:cs typeface="Calibri" pitchFamily="34" charset="-120"/>
               </a:rPr>
-              <a:t>AI·HBM향 팹 증설 + 미세화로 사용량 구조적 증가</a:t>
-            </a:r>
-            <a:endParaRPr lang="en-US" sz="1250" dirty="0"/>
+              <a:t>GC·ICP-MS·CRDS로 ppb~ppt 수준까지 관리</a:t>
+            </a:r>
+            <a:endParaRPr lang="en-US" sz="1200" dirty="0"/>
           </a:p>
           <a:p>
             <a:pPr algn="l" marL="177800" indent="-177800">
               <a:lnSpc>
-                <a:spcPct val="115000"/>
+                <a:spcPct val="116000"/>
               </a:lnSpc>
               <a:spcAft>
-                <a:spcPts val="1200"/>
+                <a:spcPts val="1300"/>
               </a:spcAft>
               <a:buSzPct val="100000"/>
               <a:buChar char="•"/>
             </a:pPr>
             <a:r>
-              <a:rPr lang="en-US" sz="1250" dirty="0">
+              <a:rPr lang="en-US" sz="1200" dirty="0">
                 <a:solidFill>
                   <a:srgbClr val="F4F8FB"/>
                 </a:solidFill>
@@ -1992,536 +2942,22 @@
                 <a:ea typeface="Calibri" pitchFamily="34" charset="-122"/>
                 <a:cs typeface="Calibri" pitchFamily="34" charset="-120"/>
               </a:rPr>
-              <a:t>최근 몇 년간, 거의 매년 지정학적 공급망 이슈 발생</a:t>
-            </a:r>
-            <a:endParaRPr lang="en-US" sz="1250" dirty="0"/>
-          </a:p>
-          <a:p>
-            <a:pPr algn="l" marL="177800" indent="-177800">
-              <a:lnSpc>
-                <a:spcPct val="115000"/>
-              </a:lnSpc>
-              <a:spcAft>
-                <a:spcPts val="1200"/>
-              </a:spcAft>
-              <a:buSzPct val="100000"/>
-              <a:buChar char="•"/>
-            </a:pPr>
-            <a:r>
-              <a:rPr lang="en-US" sz="1250" dirty="0">
-                <a:solidFill>
-                  <a:srgbClr val="F4F8FB"/>
-                </a:solidFill>
-                <a:latin typeface="Calibri" pitchFamily="34" charset="0"/>
-                <a:ea typeface="Calibri" pitchFamily="34" charset="-122"/>
-                <a:cs typeface="Calibri" pitchFamily="34" charset="-120"/>
-              </a:rPr>
-              <a:t>특정국 의존도를 낮추는 다변화·국산화가 핵심 과제</a:t>
-            </a:r>
-            <a:endParaRPr lang="en-US" sz="1250" dirty="0"/>
-          </a:p>
-        </p:txBody>
-      </p:sp>
-      <p:sp>
-        <p:nvSpPr>
-          <p:cNvPr id="36" name="Shape 34"/>
-          <p:cNvSpPr/>
-          <p:nvPr/>
-        </p:nvSpPr>
-        <p:spPr>
-          <a:xfrm>
-            <a:off x="4338218" y="3063240"/>
-            <a:ext cx="3515258" cy="3246120"/>
-          </a:xfrm>
-          <a:prstGeom prst="roundRect">
-            <a:avLst>
-              <a:gd name="adj" fmla="val 2254"/>
-            </a:avLst>
-          </a:prstGeom>
-          <a:solidFill>
-            <a:srgbClr val="133E63"/>
-          </a:solidFill>
-          <a:ln/>
-          <a:effectLst>
-            <a:outerShdw sx="100000" sy="100000" kx="0" ky="0" algn="bl" rotWithShape="0" blurRad="76200" dist="38100" dir="5400000">
-              <a:srgbClr val="000000">
-                <a:alpha val="35000"/>
-              </a:srgbClr>
-            </a:outerShdw>
-          </a:effectLst>
-        </p:spPr>
-      </p:sp>
-      <p:sp>
-        <p:nvSpPr>
-          <p:cNvPr id="37" name="Shape 35"/>
-          <p:cNvSpPr/>
-          <p:nvPr/>
-        </p:nvSpPr>
-        <p:spPr>
-          <a:xfrm>
-            <a:off x="4594250" y="3319272"/>
-            <a:ext cx="384048" cy="384048"/>
-          </a:xfrm>
-          <a:prstGeom prst="ellipse">
-            <a:avLst/>
-          </a:prstGeom>
-          <a:solidFill>
-            <a:srgbClr val="5FD3F3"/>
-          </a:solidFill>
-          <a:ln/>
-        </p:spPr>
-      </p:sp>
-      <p:sp>
-        <p:nvSpPr>
-          <p:cNvPr id="38" name="Text 36"/>
+              <a:t>공급: 특수가스(캐비닛→VMB) / 벌크가스(ASU→단지공급)</a:t>
+            </a:r>
+            <a:endParaRPr lang="en-US" sz="1200" dirty="0"/>
+          </a:p>
+        </p:txBody>
+      </p:sp>
+      <p:sp>
+        <p:nvSpPr>
+          <p:cNvPr id="58" name="Text 45"/>
           <p:cNvSpPr txBox="1"/>
           <p:nvPr/>
         </p:nvSpPr>
         <p:spPr>
           <a:xfrm>
-            <a:off x="4594250" y="3319272"/>
-            <a:ext cx="384048" cy="384048"/>
-          </a:xfrm>
-          <a:prstGeom prst="rect">
-            <a:avLst/>
-          </a:prstGeom>
-          <a:noFill/>
-          <a:ln/>
-        </p:spPr>
-        <p:txBody>
-          <a:bodyPr wrap="square" lIns="0" tIns="0" rIns="0" bIns="0" rtlCol="0" anchor="ctr"/>
-          <a:lstStyle/>
-          <a:p>
-            <a:pPr algn="ctr" indent="0" marL="0">
-              <a:buNone/>
-            </a:pPr>
-            <a:r>
-              <a:rPr lang="en-US" sz="1600" b="1" dirty="0">
-                <a:solidFill>
-                  <a:srgbClr val="0B3D62"/>
-                </a:solidFill>
-                <a:latin typeface="Calibri" pitchFamily="34" charset="0"/>
-                <a:ea typeface="Calibri" pitchFamily="34" charset="-122"/>
-                <a:cs typeface="Calibri" pitchFamily="34" charset="-120"/>
-              </a:rPr>
-              <a:t>2</a:t>
-            </a:r>
-            <a:endParaRPr lang="en-US" sz="1600" dirty="0"/>
-          </a:p>
-        </p:txBody>
-      </p:sp>
-      <p:sp>
-        <p:nvSpPr>
-          <p:cNvPr id="39" name="Text 37"/>
-          <p:cNvSpPr txBox="1"/>
-          <p:nvPr/>
-        </p:nvSpPr>
-        <p:spPr>
-          <a:xfrm>
-            <a:off x="5088026" y="3300984"/>
-            <a:ext cx="2600858" cy="384048"/>
-          </a:xfrm>
-          <a:prstGeom prst="rect">
-            <a:avLst/>
-          </a:prstGeom>
-          <a:noFill/>
-          <a:ln/>
-        </p:spPr>
-        <p:txBody>
-          <a:bodyPr wrap="square" lIns="0" tIns="0" rIns="0" bIns="0" rtlCol="0" anchor="ctr"/>
-          <a:lstStyle/>
-          <a:p>
-            <a:pPr algn="l" indent="0" marL="0">
-              <a:buNone/>
-            </a:pPr>
-            <a:r>
-              <a:rPr lang="en-US" sz="1600" b="1" dirty="0">
-                <a:solidFill>
-                  <a:srgbClr val="F4F8FB"/>
-                </a:solidFill>
-                <a:latin typeface="Cambria" pitchFamily="34" charset="0"/>
-                <a:ea typeface="Cambria" pitchFamily="34" charset="-122"/>
-                <a:cs typeface="Cambria" pitchFamily="34" charset="-120"/>
-              </a:rPr>
-              <a:t>가스란 무엇인가</a:t>
-            </a:r>
-            <a:endParaRPr lang="en-US" sz="1600" dirty="0"/>
-          </a:p>
-        </p:txBody>
-      </p:sp>
-      <p:sp>
-        <p:nvSpPr>
-          <p:cNvPr id="40" name="Text 38"/>
-          <p:cNvSpPr txBox="1"/>
-          <p:nvPr/>
-        </p:nvSpPr>
-        <p:spPr>
-          <a:xfrm>
-            <a:off x="4612538" y="3931920"/>
-            <a:ext cx="2966618" cy="2148840"/>
-          </a:xfrm>
-          <a:prstGeom prst="rect">
-            <a:avLst/>
-          </a:prstGeom>
-          <a:noFill/>
-          <a:ln/>
-        </p:spPr>
-        <p:txBody>
-          <a:bodyPr wrap="square" lIns="0" tIns="0" rIns="0" bIns="0" rtlCol="0" anchor="t"/>
-          <a:lstStyle/>
-          <a:p>
-            <a:pPr algn="l" marL="177800" indent="-177800">
-              <a:lnSpc>
-                <a:spcPct val="115000"/>
-              </a:lnSpc>
-              <a:spcAft>
-                <a:spcPts val="1200"/>
-              </a:spcAft>
-              <a:buSzPct val="100000"/>
-              <a:buChar char="•"/>
-            </a:pPr>
-            <a:r>
-              <a:rPr lang="en-US" sz="1250" dirty="0">
-                <a:solidFill>
-                  <a:srgbClr val="F4F8FB"/>
-                </a:solidFill>
-                <a:latin typeface="Calibri" pitchFamily="34" charset="0"/>
-                <a:ea typeface="Calibri" pitchFamily="34" charset="-122"/>
-                <a:cs typeface="Calibri" pitchFamily="34" charset="-120"/>
-              </a:rPr>
-              <a:t>“그릇에 담을 수 없는, 자유로운 물질”</a:t>
-            </a:r>
-            <a:endParaRPr lang="en-US" sz="1250" dirty="0"/>
-          </a:p>
-          <a:p>
-            <a:pPr algn="l" marL="177800" indent="-177800">
-              <a:lnSpc>
-                <a:spcPct val="115000"/>
-              </a:lnSpc>
-              <a:spcAft>
-                <a:spcPts val="1200"/>
-              </a:spcAft>
-              <a:buSzPct val="100000"/>
-              <a:buChar char="•"/>
-            </a:pPr>
-            <a:r>
-              <a:rPr lang="en-US" sz="1250" dirty="0">
-                <a:solidFill>
-                  <a:srgbClr val="F4F8FB"/>
-                </a:solidFill>
-                <a:latin typeface="Calibri" pitchFamily="34" charset="0"/>
-                <a:ea typeface="Calibri" pitchFamily="34" charset="-122"/>
-                <a:cs typeface="Calibri" pitchFamily="34" charset="-120"/>
-              </a:rPr>
-              <a:t>Gas(원래 기체) vs Vapor(증발해서 기체가 된 것)</a:t>
-            </a:r>
-            <a:endParaRPr lang="en-US" sz="1250" dirty="0"/>
-          </a:p>
-          <a:p>
-            <a:pPr algn="l" marL="177800" indent="-177800">
-              <a:lnSpc>
-                <a:spcPct val="115000"/>
-              </a:lnSpc>
-              <a:spcAft>
-                <a:spcPts val="1200"/>
-              </a:spcAft>
-              <a:buSzPct val="100000"/>
-              <a:buChar char="•"/>
-            </a:pPr>
-            <a:r>
-              <a:rPr lang="en-US" sz="1250" dirty="0">
-                <a:solidFill>
-                  <a:srgbClr val="F4F8FB"/>
-                </a:solidFill>
-                <a:latin typeface="Calibri" pitchFamily="34" charset="0"/>
-                <a:ea typeface="Calibri" pitchFamily="34" charset="-122"/>
-                <a:cs typeface="Calibri" pitchFamily="34" charset="-120"/>
-              </a:rPr>
-              <a:t>압축가스: 압력계 = 잔량계 / 액화가스: 무게(중량법) 관리</a:t>
-            </a:r>
-            <a:endParaRPr lang="en-US" sz="1250" dirty="0"/>
-          </a:p>
-          <a:p>
-            <a:pPr algn="l" marL="177800" indent="-177800">
-              <a:lnSpc>
-                <a:spcPct val="115000"/>
-              </a:lnSpc>
-              <a:spcAft>
-                <a:spcPts val="1200"/>
-              </a:spcAft>
-              <a:buSzPct val="100000"/>
-              <a:buChar char="•"/>
-            </a:pPr>
-            <a:r>
-              <a:rPr lang="en-US" sz="1250" dirty="0">
-                <a:solidFill>
-                  <a:srgbClr val="F4F8FB"/>
-                </a:solidFill>
-                <a:latin typeface="Calibri" pitchFamily="34" charset="0"/>
-                <a:ea typeface="Calibri" pitchFamily="34" charset="-122"/>
-                <a:cs typeface="Calibri" pitchFamily="34" charset="-120"/>
-              </a:rPr>
-              <a:t>분류 기준 6가지 — 압력·규모·혼합·상태·성질·공정접촉</a:t>
-            </a:r>
-            <a:endParaRPr lang="en-US" sz="1250" dirty="0"/>
-          </a:p>
-        </p:txBody>
-      </p:sp>
-      <p:sp>
-        <p:nvSpPr>
-          <p:cNvPr id="41" name="Shape 39"/>
-          <p:cNvSpPr/>
-          <p:nvPr/>
-        </p:nvSpPr>
-        <p:spPr>
-          <a:xfrm>
-            <a:off x="8127797" y="3063240"/>
-            <a:ext cx="3515258" cy="3246120"/>
-          </a:xfrm>
-          <a:prstGeom prst="roundRect">
-            <a:avLst>
-              <a:gd name="adj" fmla="val 2254"/>
-            </a:avLst>
-          </a:prstGeom>
-          <a:solidFill>
-            <a:srgbClr val="133E63"/>
-          </a:solidFill>
-          <a:ln/>
-          <a:effectLst>
-            <a:outerShdw sx="100000" sy="100000" kx="0" ky="0" algn="bl" rotWithShape="0" blurRad="76200" dist="38100" dir="5400000">
-              <a:srgbClr val="000000">
-                <a:alpha val="35000"/>
-              </a:srgbClr>
-            </a:outerShdw>
-          </a:effectLst>
-        </p:spPr>
-      </p:sp>
-      <p:sp>
-        <p:nvSpPr>
-          <p:cNvPr id="42" name="Shape 40"/>
-          <p:cNvSpPr/>
-          <p:nvPr/>
-        </p:nvSpPr>
-        <p:spPr>
-          <a:xfrm>
-            <a:off x="8383829" y="3319272"/>
-            <a:ext cx="384048" cy="384048"/>
-          </a:xfrm>
-          <a:prstGeom prst="ellipse">
-            <a:avLst/>
-          </a:prstGeom>
-          <a:solidFill>
-            <a:srgbClr val="5FD3F3"/>
-          </a:solidFill>
-          <a:ln/>
-        </p:spPr>
-      </p:sp>
-      <p:sp>
-        <p:nvSpPr>
-          <p:cNvPr id="43" name="Text 41"/>
-          <p:cNvSpPr txBox="1"/>
-          <p:nvPr/>
-        </p:nvSpPr>
-        <p:spPr>
-          <a:xfrm>
-            <a:off x="8383829" y="3319272"/>
-            <a:ext cx="384048" cy="384048"/>
-          </a:xfrm>
-          <a:prstGeom prst="rect">
-            <a:avLst/>
-          </a:prstGeom>
-          <a:noFill/>
-          <a:ln/>
-        </p:spPr>
-        <p:txBody>
-          <a:bodyPr wrap="square" lIns="0" tIns="0" rIns="0" bIns="0" rtlCol="0" anchor="ctr"/>
-          <a:lstStyle/>
-          <a:p>
-            <a:pPr algn="ctr" indent="0" marL="0">
-              <a:buNone/>
-            </a:pPr>
-            <a:r>
-              <a:rPr lang="en-US" sz="1600" b="1" dirty="0">
-                <a:solidFill>
-                  <a:srgbClr val="0B3D62"/>
-                </a:solidFill>
-                <a:latin typeface="Calibri" pitchFamily="34" charset="0"/>
-                <a:ea typeface="Calibri" pitchFamily="34" charset="-122"/>
-                <a:cs typeface="Calibri" pitchFamily="34" charset="-120"/>
-              </a:rPr>
-              <a:t>3</a:t>
-            </a:r>
-            <a:endParaRPr lang="en-US" sz="1600" dirty="0"/>
-          </a:p>
-        </p:txBody>
-      </p:sp>
-      <p:sp>
-        <p:nvSpPr>
-          <p:cNvPr id="44" name="Text 42"/>
-          <p:cNvSpPr txBox="1"/>
-          <p:nvPr/>
-        </p:nvSpPr>
-        <p:spPr>
-          <a:xfrm>
-            <a:off x="8877605" y="3300984"/>
-            <a:ext cx="2600858" cy="384048"/>
-          </a:xfrm>
-          <a:prstGeom prst="rect">
-            <a:avLst/>
-          </a:prstGeom>
-          <a:noFill/>
-          <a:ln/>
-        </p:spPr>
-        <p:txBody>
-          <a:bodyPr wrap="square" lIns="0" tIns="0" rIns="0" bIns="0" rtlCol="0" anchor="ctr"/>
-          <a:lstStyle/>
-          <a:p>
-            <a:pPr algn="l" indent="0" marL="0">
-              <a:buNone/>
-            </a:pPr>
-            <a:r>
-              <a:rPr lang="en-US" sz="1600" b="1" dirty="0">
-                <a:solidFill>
-                  <a:srgbClr val="F4F8FB"/>
-                </a:solidFill>
-                <a:latin typeface="Cambria" pitchFamily="34" charset="0"/>
-                <a:ea typeface="Cambria" pitchFamily="34" charset="-122"/>
-                <a:cs typeface="Cambria" pitchFamily="34" charset="-120"/>
-              </a:rPr>
-              <a:t>어떻게 관리하는가</a:t>
-            </a:r>
-            <a:endParaRPr lang="en-US" sz="1600" dirty="0"/>
-          </a:p>
-        </p:txBody>
-      </p:sp>
-      <p:sp>
-        <p:nvSpPr>
-          <p:cNvPr id="45" name="Text 43"/>
-          <p:cNvSpPr txBox="1"/>
-          <p:nvPr/>
-        </p:nvSpPr>
-        <p:spPr>
-          <a:xfrm>
-            <a:off x="8402117" y="3931920"/>
-            <a:ext cx="2966618" cy="2148840"/>
-          </a:xfrm>
-          <a:prstGeom prst="rect">
-            <a:avLst/>
-          </a:prstGeom>
-          <a:noFill/>
-          <a:ln/>
-        </p:spPr>
-        <p:txBody>
-          <a:bodyPr wrap="square" lIns="0" tIns="0" rIns="0" bIns="0" rtlCol="0" anchor="t"/>
-          <a:lstStyle/>
-          <a:p>
-            <a:pPr algn="l" marL="177800" indent="-177800">
-              <a:lnSpc>
-                <a:spcPct val="115000"/>
-              </a:lnSpc>
-              <a:spcAft>
-                <a:spcPts val="1200"/>
-              </a:spcAft>
-              <a:buSzPct val="100000"/>
-              <a:buChar char="•"/>
-            </a:pPr>
-            <a:r>
-              <a:rPr lang="en-US" sz="1250" dirty="0">
-                <a:solidFill>
-                  <a:srgbClr val="F4F8FB"/>
-                </a:solidFill>
-                <a:latin typeface="Calibri" pitchFamily="34" charset="0"/>
-                <a:ea typeface="Calibri" pitchFamily="34" charset="-122"/>
-                <a:cs typeface="Calibri" pitchFamily="34" charset="-120"/>
-              </a:rPr>
-              <a:t>제조 흐름: 합성 → 정제 → 충전/믹싱 → 분석 → 출하</a:t>
-            </a:r>
-            <a:endParaRPr lang="en-US" sz="1250" dirty="0"/>
-          </a:p>
-          <a:p>
-            <a:pPr algn="l" marL="177800" indent="-177800">
-              <a:lnSpc>
-                <a:spcPct val="115000"/>
-              </a:lnSpc>
-              <a:spcAft>
-                <a:spcPts val="1200"/>
-              </a:spcAft>
-              <a:buSzPct val="100000"/>
-              <a:buChar char="•"/>
-            </a:pPr>
-            <a:r>
-              <a:rPr lang="en-US" sz="1250" dirty="0">
-                <a:solidFill>
-                  <a:srgbClr val="F4F8FB"/>
-                </a:solidFill>
-                <a:latin typeface="Calibri" pitchFamily="34" charset="0"/>
-                <a:ea typeface="Calibri" pitchFamily="34" charset="-122"/>
-                <a:cs typeface="Calibri" pitchFamily="34" charset="-120"/>
-              </a:rPr>
-              <a:t>불순물 3대 분류 — Air · Metal · 수분</a:t>
-            </a:r>
-            <a:endParaRPr lang="en-US" sz="1250" dirty="0"/>
-          </a:p>
-          <a:p>
-            <a:pPr algn="l" marL="177800" indent="-177800">
-              <a:lnSpc>
-                <a:spcPct val="115000"/>
-              </a:lnSpc>
-              <a:spcAft>
-                <a:spcPts val="1200"/>
-              </a:spcAft>
-              <a:buSzPct val="100000"/>
-              <a:buChar char="•"/>
-            </a:pPr>
-            <a:r>
-              <a:rPr lang="en-US" sz="1250" dirty="0">
-                <a:solidFill>
-                  <a:srgbClr val="F4F8FB"/>
-                </a:solidFill>
-                <a:latin typeface="Calibri" pitchFamily="34" charset="0"/>
-                <a:ea typeface="Calibri" pitchFamily="34" charset="-122"/>
-                <a:cs typeface="Calibri" pitchFamily="34" charset="-120"/>
-              </a:rPr>
-              <a:t>GC·ICP-MS·CRDS로 ppb~ppt 수준까지 관리</a:t>
-            </a:r>
-            <a:endParaRPr lang="en-US" sz="1250" dirty="0"/>
-          </a:p>
-          <a:p>
-            <a:pPr algn="l" marL="177800" indent="-177800">
-              <a:lnSpc>
-                <a:spcPct val="115000"/>
-              </a:lnSpc>
-              <a:spcAft>
-                <a:spcPts val="1200"/>
-              </a:spcAft>
-              <a:buSzPct val="100000"/>
-              <a:buChar char="•"/>
-            </a:pPr>
-            <a:r>
-              <a:rPr lang="en-US" sz="1250" dirty="0">
-                <a:solidFill>
-                  <a:srgbClr val="F4F8FB"/>
-                </a:solidFill>
-                <a:latin typeface="Calibri" pitchFamily="34" charset="0"/>
-                <a:ea typeface="Calibri" pitchFamily="34" charset="-122"/>
-                <a:cs typeface="Calibri" pitchFamily="34" charset="-120"/>
-              </a:rPr>
-              <a:t>공급: 특수가스(캐비닛→VMB) / 벌크가스(ASU→단지공급)</a:t>
-            </a:r>
-            <a:endParaRPr lang="en-US" sz="1250" dirty="0"/>
-          </a:p>
-        </p:txBody>
-      </p:sp>
-      <p:sp>
-        <p:nvSpPr>
-          <p:cNvPr id="46" name="Text 44"/>
-          <p:cNvSpPr txBox="1"/>
-          <p:nvPr/>
-        </p:nvSpPr>
-        <p:spPr>
-          <a:xfrm>
-            <a:off x="548640" y="6473952"/>
-            <a:ext cx="11091672" cy="274320"/>
+            <a:off x="548640" y="6492240"/>
+            <a:ext cx="11091672" cy="256032"/>
           </a:xfrm>
           <a:prstGeom prst="rect">
             <a:avLst/>
